--- a/SolarWise_Jordan.pptx
+++ b/SolarWise_Jordan.pptx
@@ -5,7 +5,7 @@
     <p:sldMasterId id="2147483648" r:id="rId1"/>
   </p:sldMasterIdLst>
   <p:notesMasterIdLst>
-    <p:notesMasterId r:id="rId21"/>
+    <p:notesMasterId r:id="rId20"/>
   </p:notesMasterIdLst>
   <p:sldIdLst>
     <p:sldId id="256" r:id="rId2"/>
@@ -13,20 +13,19 @@
     <p:sldId id="259" r:id="rId4"/>
     <p:sldId id="260" r:id="rId5"/>
     <p:sldId id="261" r:id="rId6"/>
-    <p:sldId id="263" r:id="rId7"/>
-    <p:sldId id="264" r:id="rId8"/>
-    <p:sldId id="266" r:id="rId9"/>
-    <p:sldId id="267" r:id="rId10"/>
-    <p:sldId id="268" r:id="rId11"/>
-    <p:sldId id="269" r:id="rId12"/>
-    <p:sldId id="270" r:id="rId13"/>
-    <p:sldId id="271" r:id="rId14"/>
-    <p:sldId id="272" r:id="rId15"/>
-    <p:sldId id="274" r:id="rId16"/>
-    <p:sldId id="275" r:id="rId17"/>
-    <p:sldId id="281" r:id="rId18"/>
-    <p:sldId id="282" r:id="rId19"/>
-    <p:sldId id="280" r:id="rId20"/>
+    <p:sldId id="264" r:id="rId7"/>
+    <p:sldId id="266" r:id="rId8"/>
+    <p:sldId id="267" r:id="rId9"/>
+    <p:sldId id="268" r:id="rId10"/>
+    <p:sldId id="269" r:id="rId11"/>
+    <p:sldId id="270" r:id="rId12"/>
+    <p:sldId id="271" r:id="rId13"/>
+    <p:sldId id="272" r:id="rId14"/>
+    <p:sldId id="274" r:id="rId15"/>
+    <p:sldId id="275" r:id="rId16"/>
+    <p:sldId id="281" r:id="rId17"/>
+    <p:sldId id="282" r:id="rId18"/>
+    <p:sldId id="280" r:id="rId19"/>
   </p:sldIdLst>
   <p:sldSz cx="12192000" cy="6858000"/>
   <p:notesSz cx="6858000" cy="12192000"/>
@@ -128,14 +127,6 @@
     </p:ext>
   </p:extLst>
 </p:presentation>
-</file>
-
-<file path=ppt/revisionInfo.xml><?xml version="1.0" encoding="utf-8"?>
-<p1510:revInfo xmlns:a="http://schemas.openxmlformats.org/drawingml/2006/main" xmlns:r="http://schemas.openxmlformats.org/officeDocument/2006/relationships" xmlns:p1510="http://schemas.microsoft.com/office/powerpoint/2015/10/main">
-  <p1510:revLst>
-    <p1510:client id="{B381D7C8-0138-BC47-8BC6-C741D350F5A4}" v="26" dt="2026-08-29T18:36:40.423"/>
-  </p1510:revLst>
-</p1510:revInfo>
 </file>
 
 <file path=ppt/charts/chart1.xml><?xml version="1.0" encoding="utf-8"?>
@@ -1158,91 +1149,7 @@
           <a:p>
             <a:fld id="{F7021451-1387-4CA6-816F-3879F97B5CBC}" type="slidenum">
               <a:rPr lang="en-US"/>
-              <a:t>16</a:t>
-            </a:fld>
-            <a:endParaRPr lang="en-US"/>
-          </a:p>
-        </p:txBody>
-      </p:sp>
-    </p:spTree>
-    <p:extLst>
-      <p:ext uri="{BB962C8B-B14F-4D97-AF65-F5344CB8AC3E}">
-        <p14:creationId xmlns:p14="http://schemas.microsoft.com/office/powerpoint/2010/main" val="1024086991"/>
-      </p:ext>
-    </p:extLst>
-  </p:cSld>
-  <p:clrMapOvr>
-    <a:masterClrMapping/>
-  </p:clrMapOvr>
-</p:notes>
-</file>
-
-<file path=ppt/notesSlides/notesSlide17.xml><?xml version="1.0" encoding="utf-8"?>
-<p:notes xmlns:a="http://schemas.openxmlformats.org/drawingml/2006/main" xmlns:r="http://schemas.openxmlformats.org/officeDocument/2006/relationships" xmlns:p="http://schemas.openxmlformats.org/presentationml/2006/main">
-  <p:cSld>
-    <p:spTree>
-      <p:nvGrpSpPr>
-        <p:cNvPr id="1" name=""/>
-        <p:cNvGrpSpPr/>
-        <p:nvPr/>
-      </p:nvGrpSpPr>
-      <p:grpSpPr>
-        <a:xfrm>
-          <a:off x="0" y="0"/>
-          <a:ext cx="0" cy="0"/>
-          <a:chOff x="0" y="0"/>
-          <a:chExt cx="0" cy="0"/>
-        </a:xfrm>
-      </p:grpSpPr>
-      <p:sp>
-        <p:nvSpPr>
-          <p:cNvPr id="2" name="Slide Image Placeholder 1"/>
-          <p:cNvSpPr>
-            <a:spLocks noGrp="1" noRot="1" noChangeAspect="1"/>
-          </p:cNvSpPr>
-          <p:nvPr>
-            <p:ph type="sldImg"/>
-          </p:nvPr>
-        </p:nvSpPr>
-        <p:spPr/>
-      </p:sp>
-      <p:sp>
-        <p:nvSpPr>
-          <p:cNvPr id="3" name="Notes Placeholder 2"/>
-          <p:cNvSpPr>
-            <a:spLocks noGrp="1"/>
-          </p:cNvSpPr>
-          <p:nvPr>
-            <p:ph type="body" idx="1"/>
-          </p:nvPr>
-        </p:nvSpPr>
-        <p:spPr/>
-        <p:txBody>
-          <a:bodyPr/>
-          <a:lstStyle/>
-          <a:p>
-            <a:endParaRPr lang="en-US" dirty="0"/>
-          </a:p>
-        </p:txBody>
-      </p:sp>
-      <p:sp>
-        <p:nvSpPr>
-          <p:cNvPr id="4" name="Slide Number Placeholder 3"/>
-          <p:cNvSpPr>
-            <a:spLocks noGrp="1"/>
-          </p:cNvSpPr>
-          <p:nvPr>
-            <p:ph type="sldNum" sz="quarter" idx="10"/>
-          </p:nvPr>
-        </p:nvSpPr>
-        <p:spPr/>
-        <p:txBody>
-          <a:bodyPr/>
-          <a:lstStyle/>
-          <a:p>
-            <a:fld id="{F7021451-1387-4CA6-816F-3879F97B5CBC}" type="slidenum">
-              <a:rPr lang="en-US"/>
-              <a:t>19</a:t>
+              <a:t>18</a:t>
             </a:fld>
             <a:endParaRPr lang="en-US"/>
           </a:p>
@@ -2541,738 +2448,6 @@
 
 <file path=ppt/slides/slide10.xml><?xml version="1.0" encoding="utf-8"?>
 <p:sld xmlns:a="http://schemas.openxmlformats.org/drawingml/2006/main" xmlns:r="http://schemas.openxmlformats.org/officeDocument/2006/relationships" xmlns:p="http://schemas.openxmlformats.org/presentationml/2006/main">
-  <p:cSld name="Slide 13">
-    <p:bg>
-      <p:bgPr>
-        <a:solidFill>
-          <a:srgbClr val="FFFFFF"/>
-        </a:solidFill>
-        <a:effectLst/>
-      </p:bgPr>
-    </p:bg>
-    <p:spTree>
-      <p:nvGrpSpPr>
-        <p:cNvPr id="1" name=""/>
-        <p:cNvGrpSpPr/>
-        <p:nvPr/>
-      </p:nvGrpSpPr>
-      <p:grpSpPr>
-        <a:xfrm>
-          <a:off x="0" y="0"/>
-          <a:ext cx="0" cy="0"/>
-          <a:chOff x="0" y="0"/>
-          <a:chExt cx="0" cy="0"/>
-        </a:xfrm>
-      </p:grpSpPr>
-      <p:sp>
-        <p:nvSpPr>
-          <p:cNvPr id="2" name="Shape 0"/>
-          <p:cNvSpPr/>
-          <p:nvPr/>
-        </p:nvSpPr>
-        <p:spPr>
-          <a:xfrm>
-            <a:off x="0" y="0"/>
-            <a:ext cx="12191695" cy="73152"/>
-          </a:xfrm>
-          <a:prstGeom prst="rect">
-            <a:avLst/>
-          </a:prstGeom>
-          <a:solidFill>
-            <a:srgbClr val="CA8F24"/>
-          </a:solidFill>
-          <a:ln/>
-        </p:spPr>
-        <p:txBody>
-          <a:bodyPr/>
-          <a:lstStyle/>
-          <a:p>
-            <a:endParaRPr lang="en-JO"/>
-          </a:p>
-        </p:txBody>
-      </p:sp>
-      <p:sp>
-        <p:nvSpPr>
-          <p:cNvPr id="3" name="Text 1"/>
-          <p:cNvSpPr/>
-          <p:nvPr/>
-        </p:nvSpPr>
-        <p:spPr>
-          <a:xfrm>
-            <a:off x="502920" y="347472"/>
-            <a:ext cx="8229600" cy="274320"/>
-          </a:xfrm>
-          <a:prstGeom prst="rect">
-            <a:avLst/>
-          </a:prstGeom>
-          <a:noFill/>
-          <a:ln/>
-        </p:spPr>
-        <p:txBody>
-          <a:bodyPr wrap="square" rtlCol="0" anchor="ctr"/>
-          <a:lstStyle/>
-          <a:p>
-            <a:pPr marL="0" indent="0">
-              <a:buNone/>
-            </a:pPr>
-            <a:r>
-              <a:rPr lang="en-US" sz="1200" b="1" kern="0" spc="150" dirty="0">
-                <a:solidFill>
-                  <a:srgbClr val="CA8F24"/>
-                </a:solidFill>
-                <a:latin typeface="Calibri" pitchFamily="34" charset="0"/>
-                <a:ea typeface="Calibri" pitchFamily="34" charset="-122"/>
-                <a:cs typeface="Calibri" pitchFamily="34" charset="-120"/>
-              </a:rPr>
-              <a:t>05 · FINDINGS</a:t>
-            </a:r>
-            <a:endParaRPr lang="en-US" sz="1200" dirty="0"/>
-          </a:p>
-        </p:txBody>
-      </p:sp>
-      <p:sp>
-        <p:nvSpPr>
-          <p:cNvPr id="4" name="Text 2"/>
-          <p:cNvSpPr/>
-          <p:nvPr/>
-        </p:nvSpPr>
-        <p:spPr>
-          <a:xfrm>
-            <a:off x="502920" y="621792"/>
-            <a:ext cx="11155680" cy="658368"/>
-          </a:xfrm>
-          <a:prstGeom prst="rect">
-            <a:avLst/>
-          </a:prstGeom>
-          <a:noFill/>
-          <a:ln/>
-        </p:spPr>
-        <p:txBody>
-          <a:bodyPr wrap="square" rtlCol="0" anchor="ctr"/>
-          <a:lstStyle/>
-          <a:p>
-            <a:pPr marL="0" indent="0">
-              <a:buNone/>
-            </a:pPr>
-            <a:r>
-              <a:rPr lang="en-US" sz="2800" b="1" dirty="0">
-                <a:solidFill>
-                  <a:srgbClr val="143148"/>
-                </a:solidFill>
-                <a:latin typeface="Cambria" pitchFamily="34" charset="0"/>
-                <a:ea typeface="Cambria" pitchFamily="34" charset="-122"/>
-                <a:cs typeface="Cambria" pitchFamily="34" charset="-120"/>
-              </a:rPr>
-              <a:t>Finding 2 — Heat Hurts, and It Is Hidden</a:t>
-            </a:r>
-            <a:endParaRPr lang="en-US" sz="2800" dirty="0"/>
-          </a:p>
-        </p:txBody>
-      </p:sp>
-      <p:sp>
-        <p:nvSpPr>
-          <p:cNvPr id="5" name="Text 3"/>
-          <p:cNvSpPr/>
-          <p:nvPr/>
-        </p:nvSpPr>
-        <p:spPr>
-          <a:xfrm>
-            <a:off x="502920" y="6473952"/>
-            <a:ext cx="3200400" cy="274320"/>
-          </a:xfrm>
-          <a:prstGeom prst="rect">
-            <a:avLst/>
-          </a:prstGeom>
-          <a:noFill/>
-          <a:ln/>
-        </p:spPr>
-        <p:txBody>
-          <a:bodyPr wrap="square" rtlCol="0" anchor="ctr"/>
-          <a:lstStyle/>
-          <a:p>
-            <a:pPr marL="0" indent="0">
-              <a:buNone/>
-            </a:pPr>
-            <a:r>
-              <a:rPr lang="en-US" sz="1000" dirty="0">
-                <a:solidFill>
-                  <a:srgbClr val="6E6E6E"/>
-                </a:solidFill>
-                <a:latin typeface="Calibri" pitchFamily="34" charset="0"/>
-                <a:ea typeface="Calibri" pitchFamily="34" charset="-122"/>
-                <a:cs typeface="Calibri" pitchFamily="34" charset="-120"/>
-              </a:rPr>
-              <a:t>SolarWise Jordan</a:t>
-            </a:r>
-            <a:endParaRPr lang="en-US" sz="1000" dirty="0"/>
-          </a:p>
-        </p:txBody>
-      </p:sp>
-      <p:sp>
-        <p:nvSpPr>
-          <p:cNvPr id="6" name="Text 4"/>
-          <p:cNvSpPr/>
-          <p:nvPr/>
-        </p:nvSpPr>
-        <p:spPr>
-          <a:xfrm>
-            <a:off x="11231575" y="6473952"/>
-            <a:ext cx="457200" cy="274320"/>
-          </a:xfrm>
-          <a:prstGeom prst="rect">
-            <a:avLst/>
-          </a:prstGeom>
-          <a:noFill/>
-          <a:ln/>
-        </p:spPr>
-        <p:txBody>
-          <a:bodyPr wrap="square" rtlCol="0" anchor="ctr"/>
-          <a:lstStyle/>
-          <a:p>
-            <a:pPr marL="0" indent="0" algn="r">
-              <a:buNone/>
-            </a:pPr>
-            <a:r>
-              <a:rPr lang="en-US" sz="1000" dirty="0">
-                <a:solidFill>
-                  <a:srgbClr val="6E6E6E"/>
-                </a:solidFill>
-                <a:latin typeface="Calibri" pitchFamily="34" charset="0"/>
-                <a:ea typeface="Calibri" pitchFamily="34" charset="-122"/>
-                <a:cs typeface="Calibri" pitchFamily="34" charset="-120"/>
-              </a:rPr>
-              <a:t>13</a:t>
-            </a:r>
-            <a:endParaRPr lang="en-US" sz="1000" dirty="0"/>
-          </a:p>
-        </p:txBody>
-      </p:sp>
-      <p:sp>
-        <p:nvSpPr>
-          <p:cNvPr id="7" name="Text 5"/>
-          <p:cNvSpPr/>
-          <p:nvPr/>
-        </p:nvSpPr>
-        <p:spPr>
-          <a:xfrm>
-            <a:off x="502920" y="1298448"/>
-            <a:ext cx="10515600" cy="365760"/>
-          </a:xfrm>
-          <a:prstGeom prst="rect">
-            <a:avLst/>
-          </a:prstGeom>
-          <a:noFill/>
-          <a:ln/>
-        </p:spPr>
-        <p:txBody>
-          <a:bodyPr wrap="square" rtlCol="0" anchor="ctr"/>
-          <a:lstStyle/>
-          <a:p>
-            <a:pPr marL="0" indent="0">
-              <a:buNone/>
-            </a:pPr>
-            <a:r>
-              <a:rPr lang="en-US" sz="1300" i="1" dirty="0">
-                <a:solidFill>
-                  <a:srgbClr val="6E6E6E"/>
-                </a:solidFill>
-                <a:latin typeface="Calibri" pitchFamily="34" charset="0"/>
-                <a:ea typeface="Calibri" pitchFamily="34" charset="-122"/>
-                <a:cs typeface="Calibri" pitchFamily="34" charset="-120"/>
-              </a:rPr>
-              <a:t>The raw correlation says one thing; a fair comparison says the opposite.</a:t>
-            </a:r>
-            <a:endParaRPr lang="en-US" sz="1300" dirty="0"/>
-          </a:p>
-        </p:txBody>
-      </p:sp>
-      <p:sp>
-        <p:nvSpPr>
-          <p:cNvPr id="8" name="Shape 6"/>
-          <p:cNvSpPr/>
-          <p:nvPr/>
-        </p:nvSpPr>
-        <p:spPr>
-          <a:xfrm>
-            <a:off x="502920" y="1828800"/>
-            <a:ext cx="5440680" cy="2743200"/>
-          </a:xfrm>
-          <a:prstGeom prst="roundRect">
-            <a:avLst>
-              <a:gd name="adj" fmla="val 2667"/>
-            </a:avLst>
-          </a:prstGeom>
-          <a:solidFill>
-            <a:srgbClr val="F5F5F5"/>
-          </a:solidFill>
-          <a:ln/>
-        </p:spPr>
-        <p:txBody>
-          <a:bodyPr/>
-          <a:lstStyle/>
-          <a:p>
-            <a:endParaRPr lang="en-JO"/>
-          </a:p>
-        </p:txBody>
-      </p:sp>
-      <p:sp>
-        <p:nvSpPr>
-          <p:cNvPr id="9" name="Text 7"/>
-          <p:cNvSpPr/>
-          <p:nvPr/>
-        </p:nvSpPr>
-        <p:spPr>
-          <a:xfrm>
-            <a:off x="777240" y="2011680"/>
-            <a:ext cx="4937760" cy="274320"/>
-          </a:xfrm>
-          <a:prstGeom prst="rect">
-            <a:avLst/>
-          </a:prstGeom>
-          <a:noFill/>
-          <a:ln/>
-        </p:spPr>
-        <p:txBody>
-          <a:bodyPr wrap="square" rtlCol="0" anchor="ctr"/>
-          <a:lstStyle/>
-          <a:p>
-            <a:pPr marL="0" indent="0">
-              <a:buNone/>
-            </a:pPr>
-            <a:r>
-              <a:rPr lang="en-US" sz="1150" b="1" dirty="0">
-                <a:solidFill>
-                  <a:srgbClr val="CA8F24"/>
-                </a:solidFill>
-                <a:latin typeface="Calibri" pitchFamily="34" charset="0"/>
-                <a:ea typeface="Calibri" pitchFamily="34" charset="-122"/>
-                <a:cs typeface="Calibri" pitchFamily="34" charset="-120"/>
-              </a:rPr>
-              <a:t>WHAT THE NUMBERS SEEM TO SAY</a:t>
-            </a:r>
-            <a:endParaRPr lang="en-US" sz="1150" dirty="0"/>
-          </a:p>
-        </p:txBody>
-      </p:sp>
-      <p:sp>
-        <p:nvSpPr>
-          <p:cNvPr id="10" name="Text 8"/>
-          <p:cNvSpPr/>
-          <p:nvPr/>
-        </p:nvSpPr>
-        <p:spPr>
-          <a:xfrm>
-            <a:off x="777240" y="2331720"/>
-            <a:ext cx="4892040" cy="640080"/>
-          </a:xfrm>
-          <a:prstGeom prst="rect">
-            <a:avLst/>
-          </a:prstGeom>
-          <a:noFill/>
-          <a:ln/>
-        </p:spPr>
-        <p:txBody>
-          <a:bodyPr wrap="square" rtlCol="0" anchor="ctr"/>
-          <a:lstStyle/>
-          <a:p>
-            <a:pPr marL="0" indent="0">
-              <a:buNone/>
-            </a:pPr>
-            <a:r>
-              <a:rPr lang="en-US" sz="3400" b="1" dirty="0">
-                <a:solidFill>
-                  <a:srgbClr val="143148"/>
-                </a:solidFill>
-                <a:latin typeface="Cambria" pitchFamily="34" charset="0"/>
-                <a:ea typeface="Cambria" pitchFamily="34" charset="-122"/>
-                <a:cs typeface="Cambria" pitchFamily="34" charset="-120"/>
-              </a:rPr>
-              <a:t>+0.69</a:t>
-            </a:r>
-            <a:endParaRPr lang="en-US" sz="3400" dirty="0"/>
-          </a:p>
-        </p:txBody>
-      </p:sp>
-      <p:sp>
-        <p:nvSpPr>
-          <p:cNvPr id="11" name="Text 9"/>
-          <p:cNvSpPr/>
-          <p:nvPr/>
-        </p:nvSpPr>
-        <p:spPr>
-          <a:xfrm>
-            <a:off x="777240" y="2971800"/>
-            <a:ext cx="4892040" cy="320040"/>
-          </a:xfrm>
-          <a:prstGeom prst="rect">
-            <a:avLst/>
-          </a:prstGeom>
-          <a:noFill/>
-          <a:ln/>
-        </p:spPr>
-        <p:txBody>
-          <a:bodyPr wrap="square" rtlCol="0" anchor="ctr"/>
-          <a:lstStyle/>
-          <a:p>
-            <a:pPr marL="0" indent="0">
-              <a:buNone/>
-            </a:pPr>
-            <a:r>
-              <a:rPr lang="en-US" sz="1100" dirty="0">
-                <a:solidFill>
-                  <a:srgbClr val="6E6E6E"/>
-                </a:solidFill>
-                <a:latin typeface="Calibri" pitchFamily="34" charset="0"/>
-                <a:ea typeface="Calibri" pitchFamily="34" charset="-122"/>
-                <a:cs typeface="Calibri" pitchFamily="34" charset="-120"/>
-              </a:rPr>
-              <a:t>correlation between temperature and output</a:t>
-            </a:r>
-            <a:endParaRPr lang="en-US" sz="1100" dirty="0"/>
-          </a:p>
-        </p:txBody>
-      </p:sp>
-      <p:sp>
-        <p:nvSpPr>
-          <p:cNvPr id="12" name="Text 10"/>
-          <p:cNvSpPr/>
-          <p:nvPr/>
-        </p:nvSpPr>
-        <p:spPr>
-          <a:xfrm>
-            <a:off x="777240" y="3383280"/>
-            <a:ext cx="4892040" cy="1051560"/>
-          </a:xfrm>
-          <a:prstGeom prst="rect">
-            <a:avLst/>
-          </a:prstGeom>
-          <a:noFill/>
-          <a:ln/>
-        </p:spPr>
-        <p:txBody>
-          <a:bodyPr wrap="square" rtlCol="0" anchor="t"/>
-          <a:lstStyle/>
-          <a:p>
-            <a:pPr marL="0" indent="0">
-              <a:buNone/>
-            </a:pPr>
-            <a:r>
-              <a:rPr lang="en-US" sz="1200" dirty="0">
-                <a:solidFill>
-                  <a:srgbClr val="414141"/>
-                </a:solidFill>
-                <a:latin typeface="Calibri" pitchFamily="34" charset="0"/>
-                <a:ea typeface="Calibri" pitchFamily="34" charset="-122"/>
-                <a:cs typeface="Calibri" pitchFamily="34" charset="-120"/>
-              </a:rPr>
-              <a:t>Hotter days appear to produce more. But that is the season talking — hot days in Jordan are also sunny days.</a:t>
-            </a:r>
-            <a:endParaRPr lang="en-US" sz="1200" dirty="0"/>
-          </a:p>
-        </p:txBody>
-      </p:sp>
-      <p:sp>
-        <p:nvSpPr>
-          <p:cNvPr id="13" name="Shape 11"/>
-          <p:cNvSpPr/>
-          <p:nvPr/>
-        </p:nvSpPr>
-        <p:spPr>
-          <a:xfrm>
-            <a:off x="6245352" y="1828800"/>
-            <a:ext cx="5440680" cy="2743200"/>
-          </a:xfrm>
-          <a:prstGeom prst="roundRect">
-            <a:avLst>
-              <a:gd name="adj" fmla="val 2667"/>
-            </a:avLst>
-          </a:prstGeom>
-          <a:solidFill>
-            <a:srgbClr val="EBEBEB"/>
-          </a:solidFill>
-          <a:ln/>
-        </p:spPr>
-        <p:txBody>
-          <a:bodyPr/>
-          <a:lstStyle/>
-          <a:p>
-            <a:endParaRPr lang="en-JO"/>
-          </a:p>
-        </p:txBody>
-      </p:sp>
-      <p:sp>
-        <p:nvSpPr>
-          <p:cNvPr id="14" name="Text 12"/>
-          <p:cNvSpPr/>
-          <p:nvPr/>
-        </p:nvSpPr>
-        <p:spPr>
-          <a:xfrm>
-            <a:off x="6519672" y="2011680"/>
-            <a:ext cx="4937760" cy="274320"/>
-          </a:xfrm>
-          <a:prstGeom prst="rect">
-            <a:avLst/>
-          </a:prstGeom>
-          <a:noFill/>
-          <a:ln/>
-        </p:spPr>
-        <p:txBody>
-          <a:bodyPr wrap="square" rtlCol="0" anchor="ctr"/>
-          <a:lstStyle/>
-          <a:p>
-            <a:pPr marL="0" indent="0">
-              <a:buNone/>
-            </a:pPr>
-            <a:r>
-              <a:rPr lang="en-US" sz="1150" b="1" dirty="0">
-                <a:solidFill>
-                  <a:srgbClr val="CA8F24"/>
-                </a:solidFill>
-                <a:latin typeface="Calibri" pitchFamily="34" charset="0"/>
-                <a:ea typeface="Calibri" pitchFamily="34" charset="-122"/>
-                <a:cs typeface="Calibri" pitchFamily="34" charset="-120"/>
-              </a:rPr>
-              <a:t>WHAT ACTUALLY HAPPENS</a:t>
-            </a:r>
-            <a:endParaRPr lang="en-US" sz="1150" dirty="0"/>
-          </a:p>
-        </p:txBody>
-      </p:sp>
-      <p:sp>
-        <p:nvSpPr>
-          <p:cNvPr id="15" name="Text 13"/>
-          <p:cNvSpPr/>
-          <p:nvPr/>
-        </p:nvSpPr>
-        <p:spPr>
-          <a:xfrm>
-            <a:off x="6519672" y="2331720"/>
-            <a:ext cx="4892040" cy="640080"/>
-          </a:xfrm>
-          <a:prstGeom prst="rect">
-            <a:avLst/>
-          </a:prstGeom>
-          <a:noFill/>
-          <a:ln/>
-        </p:spPr>
-        <p:txBody>
-          <a:bodyPr wrap="square" rtlCol="0" anchor="ctr"/>
-          <a:lstStyle/>
-          <a:p>
-            <a:pPr marL="0" indent="0">
-              <a:buNone/>
-            </a:pPr>
-            <a:r>
-              <a:rPr lang="en-US" sz="3400" b="1" dirty="0">
-                <a:solidFill>
-                  <a:srgbClr val="143148"/>
-                </a:solidFill>
-                <a:latin typeface="Cambria" pitchFamily="34" charset="0"/>
-                <a:ea typeface="Cambria" pitchFamily="34" charset="-122"/>
-                <a:cs typeface="Cambria" pitchFamily="34" charset="-120"/>
-              </a:rPr>
-              <a:t>−0.64</a:t>
-            </a:r>
-            <a:endParaRPr lang="en-US" sz="3400" dirty="0"/>
-          </a:p>
-        </p:txBody>
-      </p:sp>
-      <p:sp>
-        <p:nvSpPr>
-          <p:cNvPr id="16" name="Text 14"/>
-          <p:cNvSpPr/>
-          <p:nvPr/>
-        </p:nvSpPr>
-        <p:spPr>
-          <a:xfrm>
-            <a:off x="6519672" y="2971800"/>
-            <a:ext cx="4892040" cy="320040"/>
-          </a:xfrm>
-          <a:prstGeom prst="rect">
-            <a:avLst/>
-          </a:prstGeom>
-          <a:noFill/>
-          <a:ln/>
-        </p:spPr>
-        <p:txBody>
-          <a:bodyPr wrap="square" rtlCol="0" anchor="ctr"/>
-          <a:lstStyle/>
-          <a:p>
-            <a:pPr marL="0" indent="0">
-              <a:buNone/>
-            </a:pPr>
-            <a:r>
-              <a:rPr lang="en-US" sz="1100" dirty="0">
-                <a:solidFill>
-                  <a:srgbClr val="6E6E6E"/>
-                </a:solidFill>
-                <a:latin typeface="Calibri" pitchFamily="34" charset="0"/>
-                <a:ea typeface="Calibri" pitchFamily="34" charset="-122"/>
-                <a:cs typeface="Calibri" pitchFamily="34" charset="-120"/>
-              </a:rPr>
-              <a:t>once days with the same sunlight are compared</a:t>
-            </a:r>
-            <a:endParaRPr lang="en-US" sz="1100" dirty="0"/>
-          </a:p>
-        </p:txBody>
-      </p:sp>
-      <p:sp>
-        <p:nvSpPr>
-          <p:cNvPr id="17" name="Text 15"/>
-          <p:cNvSpPr/>
-          <p:nvPr/>
-        </p:nvSpPr>
-        <p:spPr>
-          <a:xfrm>
-            <a:off x="6519672" y="3383280"/>
-            <a:ext cx="4892040" cy="1051560"/>
-          </a:xfrm>
-          <a:prstGeom prst="rect">
-            <a:avLst/>
-          </a:prstGeom>
-          <a:noFill/>
-          <a:ln/>
-        </p:spPr>
-        <p:txBody>
-          <a:bodyPr wrap="square" rtlCol="0" anchor="t"/>
-          <a:lstStyle/>
-          <a:p>
-            <a:pPr marL="0" indent="0">
-              <a:buNone/>
-            </a:pPr>
-            <a:r>
-              <a:rPr lang="en-US" sz="1200" dirty="0">
-                <a:solidFill>
-                  <a:srgbClr val="414141"/>
-                </a:solidFill>
-                <a:latin typeface="Calibri" pitchFamily="34" charset="0"/>
-                <a:ea typeface="Calibri" pitchFamily="34" charset="-122"/>
-                <a:cs typeface="Calibri" pitchFamily="34" charset="-120"/>
-              </a:rPr>
-              <a:t>Hold sunlight constant and hot days produce 5.2% less. The physics was there all along, hidden by the season.</a:t>
-            </a:r>
-            <a:endParaRPr lang="en-US" sz="1200" dirty="0"/>
-          </a:p>
-        </p:txBody>
-      </p:sp>
-      <p:sp>
-        <p:nvSpPr>
-          <p:cNvPr id="18" name="Shape 16"/>
-          <p:cNvSpPr/>
-          <p:nvPr/>
-        </p:nvSpPr>
-        <p:spPr>
-          <a:xfrm>
-            <a:off x="502920" y="4800600"/>
-            <a:ext cx="11183112" cy="1508760"/>
-          </a:xfrm>
-          <a:prstGeom prst="roundRect">
-            <a:avLst>
-              <a:gd name="adj" fmla="val 3636"/>
-            </a:avLst>
-          </a:prstGeom>
-          <a:solidFill>
-            <a:srgbClr val="143148"/>
-          </a:solidFill>
-          <a:ln/>
-        </p:spPr>
-        <p:txBody>
-          <a:bodyPr/>
-          <a:lstStyle/>
-          <a:p>
-            <a:endParaRPr lang="en-JO"/>
-          </a:p>
-        </p:txBody>
-      </p:sp>
-      <p:sp>
-        <p:nvSpPr>
-          <p:cNvPr id="19" name="Text 17"/>
-          <p:cNvSpPr/>
-          <p:nvPr/>
-        </p:nvSpPr>
-        <p:spPr>
-          <a:xfrm>
-            <a:off x="777240" y="4956048"/>
-            <a:ext cx="10515600" cy="274320"/>
-          </a:xfrm>
-          <a:prstGeom prst="rect">
-            <a:avLst/>
-          </a:prstGeom>
-          <a:noFill/>
-          <a:ln/>
-        </p:spPr>
-        <p:txBody>
-          <a:bodyPr wrap="square" rtlCol="0" anchor="ctr"/>
-          <a:lstStyle/>
-          <a:p>
-            <a:pPr marL="0" indent="0">
-              <a:buNone/>
-            </a:pPr>
-            <a:r>
-              <a:rPr lang="en-US" sz="1200" b="1" dirty="0">
-                <a:solidFill>
-                  <a:srgbClr val="EEBE51"/>
-                </a:solidFill>
-                <a:latin typeface="Calibri" pitchFamily="34" charset="0"/>
-                <a:ea typeface="Calibri" pitchFamily="34" charset="-122"/>
-                <a:cs typeface="Calibri" pitchFamily="34" charset="-120"/>
-              </a:rPr>
-              <a:t>WHY THE PEAK MONTH IS JUNE, NOT JULY</a:t>
-            </a:r>
-            <a:endParaRPr lang="en-US" sz="1200" dirty="0"/>
-          </a:p>
-        </p:txBody>
-      </p:sp>
-      <p:sp>
-        <p:nvSpPr>
-          <p:cNvPr id="20" name="Text 18"/>
-          <p:cNvSpPr/>
-          <p:nvPr/>
-        </p:nvSpPr>
-        <p:spPr>
-          <a:xfrm>
-            <a:off x="777240" y="5285232"/>
-            <a:ext cx="10607040" cy="914400"/>
-          </a:xfrm>
-          <a:prstGeom prst="rect">
-            <a:avLst/>
-          </a:prstGeom>
-          <a:noFill/>
-          <a:ln/>
-        </p:spPr>
-        <p:txBody>
-          <a:bodyPr wrap="square" rtlCol="0" anchor="t"/>
-          <a:lstStyle/>
-          <a:p>
-            <a:pPr marL="0" indent="0">
-              <a:buNone/>
-            </a:pPr>
-            <a:r>
-              <a:rPr lang="en-US" sz="1300" dirty="0">
-                <a:solidFill>
-                  <a:srgbClr val="FFFFFF"/>
-                </a:solidFill>
-                <a:latin typeface="Calibri" pitchFamily="34" charset="0"/>
-                <a:ea typeface="Calibri" pitchFamily="34" charset="-122"/>
-                <a:cs typeface="Calibri" pitchFamily="34" charset="-120"/>
-              </a:rPr>
-              <a:t>July receives slightly more sunlight, but it is hotter — and the panels pay for it. The model reproduces this without being told.</a:t>
-            </a:r>
-            <a:endParaRPr lang="en-US" sz="1300" dirty="0"/>
-          </a:p>
-        </p:txBody>
-      </p:sp>
-    </p:spTree>
-  </p:cSld>
-  <p:clrMapOvr>
-    <a:masterClrMapping/>
-  </p:clrMapOvr>
-</p:sld>
-</file>
-
-<file path=ppt/slides/slide11.xml><?xml version="1.0" encoding="utf-8"?>
-<p:sld xmlns:a="http://schemas.openxmlformats.org/drawingml/2006/main" xmlns:r="http://schemas.openxmlformats.org/officeDocument/2006/relationships" xmlns:p="http://schemas.openxmlformats.org/presentationml/2006/main">
   <p:cSld name="Slide 14">
     <p:bg>
       <p:bgPr>
@@ -4207,7 +3382,7 @@
 </p:sld>
 </file>
 
-<file path=ppt/slides/slide12.xml><?xml version="1.0" encoding="utf-8"?>
+<file path=ppt/slides/slide11.xml><?xml version="1.0" encoding="utf-8"?>
 <p:sld xmlns:a="http://schemas.openxmlformats.org/drawingml/2006/main" xmlns:r="http://schemas.openxmlformats.org/officeDocument/2006/relationships" xmlns:p="http://schemas.openxmlformats.org/presentationml/2006/main">
   <p:cSld name="Slide 15">
     <p:bg>
@@ -6209,7 +5384,7 @@
 </p:sld>
 </file>
 
-<file path=ppt/slides/slide13.xml><?xml version="1.0" encoding="utf-8"?>
+<file path=ppt/slides/slide12.xml><?xml version="1.0" encoding="utf-8"?>
 <p:sld xmlns:a="http://schemas.openxmlformats.org/drawingml/2006/main" xmlns:r="http://schemas.openxmlformats.org/officeDocument/2006/relationships" xmlns:p="http://schemas.openxmlformats.org/presentationml/2006/main">
   <p:cSld name="Slide 16">
     <p:bg>
@@ -7077,7 +6252,7 @@
 </p:sld>
 </file>
 
-<file path=ppt/slides/slide14.xml><?xml version="1.0" encoding="utf-8"?>
+<file path=ppt/slides/slide13.xml><?xml version="1.0" encoding="utf-8"?>
 <p:sld xmlns:a="http://schemas.openxmlformats.org/drawingml/2006/main" xmlns:r="http://schemas.openxmlformats.org/officeDocument/2006/relationships" xmlns:p="http://schemas.openxmlformats.org/presentationml/2006/main">
   <p:cSld name="Slide 17">
     <p:bg>
@@ -8013,7 +7188,7 @@
 </p:sld>
 </file>
 
-<file path=ppt/slides/slide15.xml><?xml version="1.0" encoding="utf-8"?>
+<file path=ppt/slides/slide14.xml><?xml version="1.0" encoding="utf-8"?>
 <p:sld xmlns:a="http://schemas.openxmlformats.org/drawingml/2006/main" xmlns:r="http://schemas.openxmlformats.org/officeDocument/2006/relationships" xmlns:p="http://schemas.openxmlformats.org/presentationml/2006/main">
   <p:cSld name="Slide 19">
     <p:bg>
@@ -9021,7 +8196,7 @@
 </p:sld>
 </file>
 
-<file path=ppt/slides/slide16.xml><?xml version="1.0" encoding="utf-8"?>
+<file path=ppt/slides/slide15.xml><?xml version="1.0" encoding="utf-8"?>
 <p:sld xmlns:a="http://schemas.openxmlformats.org/drawingml/2006/main" xmlns:r="http://schemas.openxmlformats.org/officeDocument/2006/relationships" xmlns:p="http://schemas.openxmlformats.org/presentationml/2006/main">
   <p:cSld name="Slide 20">
     <p:bg>
@@ -9793,6 +8968,261 @@
 </p:sld>
 </file>
 
+<file path=ppt/slides/slide16.xml><?xml version="1.0" encoding="utf-8"?>
+<p:sld xmlns:a="http://schemas.openxmlformats.org/drawingml/2006/main" xmlns:r="http://schemas.openxmlformats.org/officeDocument/2006/relationships" xmlns:p="http://schemas.openxmlformats.org/presentationml/2006/main">
+  <p:cSld>
+    <p:spTree>
+      <p:nvGrpSpPr>
+        <p:cNvPr id="1" name=""/>
+        <p:cNvGrpSpPr/>
+        <p:nvPr/>
+      </p:nvGrpSpPr>
+      <p:grpSpPr>
+        <a:xfrm>
+          <a:off x="0" y="0"/>
+          <a:ext cx="0" cy="0"/>
+          <a:chOff x="0" y="0"/>
+          <a:chExt cx="0" cy="0"/>
+        </a:xfrm>
+      </p:grpSpPr>
+      <p:sp>
+        <p:nvSpPr>
+          <p:cNvPr id="4" name="TextBox 3">
+            <a:extLst>
+              <a:ext uri="{FF2B5EF4-FFF2-40B4-BE49-F238E27FC236}">
+                <a16:creationId xmlns:a16="http://schemas.microsoft.com/office/drawing/2014/main" id="{A65C309C-6AA7-660C-31BE-E68B6E5B323B}"/>
+              </a:ext>
+            </a:extLst>
+          </p:cNvPr>
+          <p:cNvSpPr txBox="1"/>
+          <p:nvPr/>
+        </p:nvSpPr>
+        <p:spPr>
+          <a:xfrm>
+            <a:off x="599090" y="919711"/>
+            <a:ext cx="2816669" cy="646331"/>
+          </a:xfrm>
+          <a:prstGeom prst="rect">
+            <a:avLst/>
+          </a:prstGeom>
+          <a:noFill/>
+        </p:spPr>
+        <p:txBody>
+          <a:bodyPr wrap="none" rtlCol="0">
+            <a:spAutoFit/>
+          </a:bodyPr>
+          <a:lstStyle/>
+          <a:p>
+            <a:r>
+              <a:rPr lang="en-US" b="1" dirty="0">
+                <a:solidFill>
+                  <a:srgbClr val="143148"/>
+                </a:solidFill>
+                <a:latin typeface="Cambria" pitchFamily="34" charset="0"/>
+                <a:ea typeface="Cambria" pitchFamily="34" charset="-122"/>
+                <a:cs typeface="Cambria" pitchFamily="34" charset="-120"/>
+              </a:rPr>
+              <a:t>Solar Resource Overview</a:t>
+            </a:r>
+            <a:endParaRPr lang="en-US" dirty="0"/>
+          </a:p>
+          <a:p>
+            <a:endParaRPr lang="en-JO" dirty="0"/>
+          </a:p>
+        </p:txBody>
+      </p:sp>
+      <p:pic>
+        <p:nvPicPr>
+          <p:cNvPr id="6" name="Picture 5">
+            <a:extLst>
+              <a:ext uri="{FF2B5EF4-FFF2-40B4-BE49-F238E27FC236}">
+                <a16:creationId xmlns:a16="http://schemas.microsoft.com/office/drawing/2014/main" id="{6A30C483-337F-D1E4-1E10-ABBC984B0A68}"/>
+              </a:ext>
+            </a:extLst>
+          </p:cNvPr>
+          <p:cNvPicPr>
+            <a:picLocks noChangeAspect="1"/>
+          </p:cNvPicPr>
+          <p:nvPr/>
+        </p:nvPicPr>
+        <p:blipFill>
+          <a:blip r:embed="rId2"/>
+          <a:stretch>
+            <a:fillRect/>
+          </a:stretch>
+        </p:blipFill>
+        <p:spPr>
+          <a:xfrm>
+            <a:off x="308161" y="1534512"/>
+            <a:ext cx="8260105" cy="4634537"/>
+          </a:xfrm>
+          <a:prstGeom prst="rect">
+            <a:avLst/>
+          </a:prstGeom>
+        </p:spPr>
+      </p:pic>
+      <p:pic>
+        <p:nvPicPr>
+          <p:cNvPr id="7" name="Picture 6">
+            <a:extLst>
+              <a:ext uri="{FF2B5EF4-FFF2-40B4-BE49-F238E27FC236}">
+                <a16:creationId xmlns:a16="http://schemas.microsoft.com/office/drawing/2014/main" id="{ED9578FC-A563-CA3B-7DDC-DE59049DB462}"/>
+              </a:ext>
+            </a:extLst>
+          </p:cNvPr>
+          <p:cNvPicPr>
+            <a:picLocks noChangeAspect="1"/>
+          </p:cNvPicPr>
+          <p:nvPr/>
+        </p:nvPicPr>
+        <p:blipFill>
+          <a:blip r:embed="rId3"/>
+          <a:stretch>
+            <a:fillRect/>
+          </a:stretch>
+        </p:blipFill>
+        <p:spPr>
+          <a:xfrm>
+            <a:off x="8568266" y="1456773"/>
+            <a:ext cx="3024643" cy="4520693"/>
+          </a:xfrm>
+          <a:prstGeom prst="rect">
+            <a:avLst/>
+          </a:prstGeom>
+        </p:spPr>
+      </p:pic>
+      <p:pic>
+        <p:nvPicPr>
+          <p:cNvPr id="11" name="Picture 10">
+            <a:extLst>
+              <a:ext uri="{FF2B5EF4-FFF2-40B4-BE49-F238E27FC236}">
+                <a16:creationId xmlns:a16="http://schemas.microsoft.com/office/drawing/2014/main" id="{6FF1B51C-0225-2CBD-329C-1022AAC7FF62}"/>
+              </a:ext>
+            </a:extLst>
+          </p:cNvPr>
+          <p:cNvPicPr>
+            <a:picLocks noChangeAspect="1"/>
+          </p:cNvPicPr>
+          <p:nvPr/>
+        </p:nvPicPr>
+        <p:blipFill>
+          <a:blip r:embed="rId4"/>
+          <a:stretch>
+            <a:fillRect/>
+          </a:stretch>
+        </p:blipFill>
+        <p:spPr>
+          <a:xfrm>
+            <a:off x="-21021" y="11090"/>
+            <a:ext cx="12192000" cy="646331"/>
+          </a:xfrm>
+          <a:prstGeom prst="rect">
+            <a:avLst/>
+          </a:prstGeom>
+        </p:spPr>
+      </p:pic>
+      <p:sp>
+        <p:nvSpPr>
+          <p:cNvPr id="12" name="TextBox 11">
+            <a:extLst>
+              <a:ext uri="{FF2B5EF4-FFF2-40B4-BE49-F238E27FC236}">
+                <a16:creationId xmlns:a16="http://schemas.microsoft.com/office/drawing/2014/main" id="{8830B7FF-46E3-869A-66B4-ACD9115BDC9F}"/>
+              </a:ext>
+            </a:extLst>
+          </p:cNvPr>
+          <p:cNvSpPr txBox="1"/>
+          <p:nvPr/>
+        </p:nvSpPr>
+        <p:spPr>
+          <a:xfrm>
+            <a:off x="735724" y="6589986"/>
+            <a:ext cx="184731" cy="369332"/>
+          </a:xfrm>
+          <a:prstGeom prst="rect">
+            <a:avLst/>
+          </a:prstGeom>
+          <a:noFill/>
+        </p:spPr>
+        <p:txBody>
+          <a:bodyPr wrap="none" rtlCol="0">
+            <a:spAutoFit/>
+          </a:bodyPr>
+          <a:lstStyle/>
+          <a:p>
+            <a:endParaRPr lang="en-JO" dirty="0"/>
+          </a:p>
+        </p:txBody>
+      </p:sp>
+      <p:sp>
+        <p:nvSpPr>
+          <p:cNvPr id="13" name="TextBox 12">
+            <a:extLst>
+              <a:ext uri="{FF2B5EF4-FFF2-40B4-BE49-F238E27FC236}">
+                <a16:creationId xmlns:a16="http://schemas.microsoft.com/office/drawing/2014/main" id="{13E69B8E-ED15-EB36-19C2-679BF1932B78}"/>
+              </a:ext>
+            </a:extLst>
+          </p:cNvPr>
+          <p:cNvSpPr txBox="1"/>
+          <p:nvPr/>
+        </p:nvSpPr>
+        <p:spPr>
+          <a:xfrm>
+            <a:off x="380082" y="6446608"/>
+            <a:ext cx="1080745" cy="523220"/>
+          </a:xfrm>
+          <a:prstGeom prst="rect">
+            <a:avLst/>
+          </a:prstGeom>
+          <a:noFill/>
+        </p:spPr>
+        <p:txBody>
+          <a:bodyPr wrap="none" rtlCol="0">
+            <a:spAutoFit/>
+          </a:bodyPr>
+          <a:lstStyle/>
+          <a:p>
+            <a:r>
+              <a:rPr lang="en-US" sz="1000" dirty="0" err="1">
+                <a:solidFill>
+                  <a:srgbClr val="6E6E6E"/>
+                </a:solidFill>
+                <a:latin typeface="Calibri" pitchFamily="34" charset="0"/>
+                <a:ea typeface="Calibri" pitchFamily="34" charset="-122"/>
+                <a:cs typeface="Calibri" pitchFamily="34" charset="-120"/>
+              </a:rPr>
+              <a:t>SolarWise</a:t>
+            </a:r>
+            <a:r>
+              <a:rPr lang="en-US" sz="1000" dirty="0">
+                <a:solidFill>
+                  <a:srgbClr val="6E6E6E"/>
+                </a:solidFill>
+                <a:latin typeface="Calibri" pitchFamily="34" charset="0"/>
+                <a:ea typeface="Calibri" pitchFamily="34" charset="-122"/>
+                <a:cs typeface="Calibri" pitchFamily="34" charset="-120"/>
+              </a:rPr>
+              <a:t> Jordan</a:t>
+            </a:r>
+            <a:endParaRPr lang="en-US" sz="1000" dirty="0"/>
+          </a:p>
+          <a:p>
+            <a:endParaRPr lang="en-JO" dirty="0"/>
+          </a:p>
+        </p:txBody>
+      </p:sp>
+    </p:spTree>
+    <p:extLst>
+      <p:ext uri="{BB962C8B-B14F-4D97-AF65-F5344CB8AC3E}">
+        <p14:creationId xmlns:p14="http://schemas.microsoft.com/office/powerpoint/2010/main" val="1844204991"/>
+      </p:ext>
+    </p:extLst>
+  </p:cSld>
+  <p:clrMapOvr>
+    <a:masterClrMapping/>
+  </p:clrMapOvr>
+</p:sld>
+</file>
+
 <file path=ppt/slides/slide17.xml><?xml version="1.0" encoding="utf-8"?>
 <p:sld xmlns:a="http://schemas.openxmlformats.org/drawingml/2006/main" xmlns:r="http://schemas.openxmlformats.org/officeDocument/2006/relationships" xmlns:p="http://schemas.openxmlformats.org/presentationml/2006/main">
   <p:cSld>
@@ -9812,261 +9242,6 @@
       </p:grpSpPr>
       <p:sp>
         <p:nvSpPr>
-          <p:cNvPr id="4" name="TextBox 3">
-            <a:extLst>
-              <a:ext uri="{FF2B5EF4-FFF2-40B4-BE49-F238E27FC236}">
-                <a16:creationId xmlns:a16="http://schemas.microsoft.com/office/drawing/2014/main" id="{A65C309C-6AA7-660C-31BE-E68B6E5B323B}"/>
-              </a:ext>
-            </a:extLst>
-          </p:cNvPr>
-          <p:cNvSpPr txBox="1"/>
-          <p:nvPr/>
-        </p:nvSpPr>
-        <p:spPr>
-          <a:xfrm>
-            <a:off x="599090" y="919711"/>
-            <a:ext cx="2816669" cy="646331"/>
-          </a:xfrm>
-          <a:prstGeom prst="rect">
-            <a:avLst/>
-          </a:prstGeom>
-          <a:noFill/>
-        </p:spPr>
-        <p:txBody>
-          <a:bodyPr wrap="none" rtlCol="0">
-            <a:spAutoFit/>
-          </a:bodyPr>
-          <a:lstStyle/>
-          <a:p>
-            <a:r>
-              <a:rPr lang="en-US" b="1" dirty="0">
-                <a:solidFill>
-                  <a:srgbClr val="143148"/>
-                </a:solidFill>
-                <a:latin typeface="Cambria" pitchFamily="34" charset="0"/>
-                <a:ea typeface="Cambria" pitchFamily="34" charset="-122"/>
-                <a:cs typeface="Cambria" pitchFamily="34" charset="-120"/>
-              </a:rPr>
-              <a:t>Solar Resource Overview</a:t>
-            </a:r>
-            <a:endParaRPr lang="en-US" dirty="0"/>
-          </a:p>
-          <a:p>
-            <a:endParaRPr lang="en-JO" dirty="0"/>
-          </a:p>
-        </p:txBody>
-      </p:sp>
-      <p:pic>
-        <p:nvPicPr>
-          <p:cNvPr id="6" name="Picture 5">
-            <a:extLst>
-              <a:ext uri="{FF2B5EF4-FFF2-40B4-BE49-F238E27FC236}">
-                <a16:creationId xmlns:a16="http://schemas.microsoft.com/office/drawing/2014/main" id="{6A30C483-337F-D1E4-1E10-ABBC984B0A68}"/>
-              </a:ext>
-            </a:extLst>
-          </p:cNvPr>
-          <p:cNvPicPr>
-            <a:picLocks noChangeAspect="1"/>
-          </p:cNvPicPr>
-          <p:nvPr/>
-        </p:nvPicPr>
-        <p:blipFill>
-          <a:blip r:embed="rId2"/>
-          <a:stretch>
-            <a:fillRect/>
-          </a:stretch>
-        </p:blipFill>
-        <p:spPr>
-          <a:xfrm>
-            <a:off x="308161" y="1534512"/>
-            <a:ext cx="8260105" cy="4634537"/>
-          </a:xfrm>
-          <a:prstGeom prst="rect">
-            <a:avLst/>
-          </a:prstGeom>
-        </p:spPr>
-      </p:pic>
-      <p:pic>
-        <p:nvPicPr>
-          <p:cNvPr id="7" name="Picture 6">
-            <a:extLst>
-              <a:ext uri="{FF2B5EF4-FFF2-40B4-BE49-F238E27FC236}">
-                <a16:creationId xmlns:a16="http://schemas.microsoft.com/office/drawing/2014/main" id="{ED9578FC-A563-CA3B-7DDC-DE59049DB462}"/>
-              </a:ext>
-            </a:extLst>
-          </p:cNvPr>
-          <p:cNvPicPr>
-            <a:picLocks noChangeAspect="1"/>
-          </p:cNvPicPr>
-          <p:nvPr/>
-        </p:nvPicPr>
-        <p:blipFill>
-          <a:blip r:embed="rId3"/>
-          <a:stretch>
-            <a:fillRect/>
-          </a:stretch>
-        </p:blipFill>
-        <p:spPr>
-          <a:xfrm>
-            <a:off x="8568266" y="1456773"/>
-            <a:ext cx="3024643" cy="4520693"/>
-          </a:xfrm>
-          <a:prstGeom prst="rect">
-            <a:avLst/>
-          </a:prstGeom>
-        </p:spPr>
-      </p:pic>
-      <p:pic>
-        <p:nvPicPr>
-          <p:cNvPr id="11" name="Picture 10">
-            <a:extLst>
-              <a:ext uri="{FF2B5EF4-FFF2-40B4-BE49-F238E27FC236}">
-                <a16:creationId xmlns:a16="http://schemas.microsoft.com/office/drawing/2014/main" id="{6FF1B51C-0225-2CBD-329C-1022AAC7FF62}"/>
-              </a:ext>
-            </a:extLst>
-          </p:cNvPr>
-          <p:cNvPicPr>
-            <a:picLocks noChangeAspect="1"/>
-          </p:cNvPicPr>
-          <p:nvPr/>
-        </p:nvPicPr>
-        <p:blipFill>
-          <a:blip r:embed="rId4"/>
-          <a:stretch>
-            <a:fillRect/>
-          </a:stretch>
-        </p:blipFill>
-        <p:spPr>
-          <a:xfrm>
-            <a:off x="-21021" y="11090"/>
-            <a:ext cx="12192000" cy="646331"/>
-          </a:xfrm>
-          <a:prstGeom prst="rect">
-            <a:avLst/>
-          </a:prstGeom>
-        </p:spPr>
-      </p:pic>
-      <p:sp>
-        <p:nvSpPr>
-          <p:cNvPr id="12" name="TextBox 11">
-            <a:extLst>
-              <a:ext uri="{FF2B5EF4-FFF2-40B4-BE49-F238E27FC236}">
-                <a16:creationId xmlns:a16="http://schemas.microsoft.com/office/drawing/2014/main" id="{8830B7FF-46E3-869A-66B4-ACD9115BDC9F}"/>
-              </a:ext>
-            </a:extLst>
-          </p:cNvPr>
-          <p:cNvSpPr txBox="1"/>
-          <p:nvPr/>
-        </p:nvSpPr>
-        <p:spPr>
-          <a:xfrm>
-            <a:off x="735724" y="6589986"/>
-            <a:ext cx="184731" cy="369332"/>
-          </a:xfrm>
-          <a:prstGeom prst="rect">
-            <a:avLst/>
-          </a:prstGeom>
-          <a:noFill/>
-        </p:spPr>
-        <p:txBody>
-          <a:bodyPr wrap="none" rtlCol="0">
-            <a:spAutoFit/>
-          </a:bodyPr>
-          <a:lstStyle/>
-          <a:p>
-            <a:endParaRPr lang="en-JO" dirty="0"/>
-          </a:p>
-        </p:txBody>
-      </p:sp>
-      <p:sp>
-        <p:nvSpPr>
-          <p:cNvPr id="13" name="TextBox 12">
-            <a:extLst>
-              <a:ext uri="{FF2B5EF4-FFF2-40B4-BE49-F238E27FC236}">
-                <a16:creationId xmlns:a16="http://schemas.microsoft.com/office/drawing/2014/main" id="{13E69B8E-ED15-EB36-19C2-679BF1932B78}"/>
-              </a:ext>
-            </a:extLst>
-          </p:cNvPr>
-          <p:cNvSpPr txBox="1"/>
-          <p:nvPr/>
-        </p:nvSpPr>
-        <p:spPr>
-          <a:xfrm>
-            <a:off x="380082" y="6446608"/>
-            <a:ext cx="1080745" cy="523220"/>
-          </a:xfrm>
-          <a:prstGeom prst="rect">
-            <a:avLst/>
-          </a:prstGeom>
-          <a:noFill/>
-        </p:spPr>
-        <p:txBody>
-          <a:bodyPr wrap="none" rtlCol="0">
-            <a:spAutoFit/>
-          </a:bodyPr>
-          <a:lstStyle/>
-          <a:p>
-            <a:r>
-              <a:rPr lang="en-US" sz="1000" dirty="0" err="1">
-                <a:solidFill>
-                  <a:srgbClr val="6E6E6E"/>
-                </a:solidFill>
-                <a:latin typeface="Calibri" pitchFamily="34" charset="0"/>
-                <a:ea typeface="Calibri" pitchFamily="34" charset="-122"/>
-                <a:cs typeface="Calibri" pitchFamily="34" charset="-120"/>
-              </a:rPr>
-              <a:t>SolarWise</a:t>
-            </a:r>
-            <a:r>
-              <a:rPr lang="en-US" sz="1000" dirty="0">
-                <a:solidFill>
-                  <a:srgbClr val="6E6E6E"/>
-                </a:solidFill>
-                <a:latin typeface="Calibri" pitchFamily="34" charset="0"/>
-                <a:ea typeface="Calibri" pitchFamily="34" charset="-122"/>
-                <a:cs typeface="Calibri" pitchFamily="34" charset="-120"/>
-              </a:rPr>
-              <a:t> Jordan</a:t>
-            </a:r>
-            <a:endParaRPr lang="en-US" sz="1000" dirty="0"/>
-          </a:p>
-          <a:p>
-            <a:endParaRPr lang="en-JO" dirty="0"/>
-          </a:p>
-        </p:txBody>
-      </p:sp>
-    </p:spTree>
-    <p:extLst>
-      <p:ext uri="{BB962C8B-B14F-4D97-AF65-F5344CB8AC3E}">
-        <p14:creationId xmlns:p14="http://schemas.microsoft.com/office/powerpoint/2010/main" val="1844204991"/>
-      </p:ext>
-    </p:extLst>
-  </p:cSld>
-  <p:clrMapOvr>
-    <a:masterClrMapping/>
-  </p:clrMapOvr>
-</p:sld>
-</file>
-
-<file path=ppt/slides/slide18.xml><?xml version="1.0" encoding="utf-8"?>
-<p:sld xmlns:a="http://schemas.openxmlformats.org/drawingml/2006/main" xmlns:r="http://schemas.openxmlformats.org/officeDocument/2006/relationships" xmlns:p="http://schemas.openxmlformats.org/presentationml/2006/main">
-  <p:cSld>
-    <p:spTree>
-      <p:nvGrpSpPr>
-        <p:cNvPr id="1" name=""/>
-        <p:cNvGrpSpPr/>
-        <p:nvPr/>
-      </p:nvGrpSpPr>
-      <p:grpSpPr>
-        <a:xfrm>
-          <a:off x="0" y="0"/>
-          <a:ext cx="0" cy="0"/>
-          <a:chOff x="0" y="0"/>
-          <a:chExt cx="0" cy="0"/>
-        </a:xfrm>
-      </p:grpSpPr>
-      <p:sp>
-        <p:nvSpPr>
           <p:cNvPr id="2" name="TextBox 1">
             <a:extLst>
               <a:ext uri="{FF2B5EF4-FFF2-40B4-BE49-F238E27FC236}">
@@ -10268,7 +9443,7 @@
 </p:sld>
 </file>
 
-<file path=ppt/slides/slide19.xml><?xml version="1.0" encoding="utf-8"?>
+<file path=ppt/slides/slide18.xml><?xml version="1.0" encoding="utf-8"?>
 <p:sld xmlns:a="http://schemas.openxmlformats.org/drawingml/2006/main" xmlns:r="http://schemas.openxmlformats.org/officeDocument/2006/relationships" xmlns:p="http://schemas.openxmlformats.org/presentationml/2006/main">
   <p:cSld name="Slide 25">
     <p:bg>
@@ -15279,952 +14454,6 @@
 
 <file path=ppt/slides/slide6.xml><?xml version="1.0" encoding="utf-8"?>
 <p:sld xmlns:a="http://schemas.openxmlformats.org/drawingml/2006/main" xmlns:r="http://schemas.openxmlformats.org/officeDocument/2006/relationships" xmlns:p="http://schemas.openxmlformats.org/presentationml/2006/main">
-  <p:cSld name="Slide 8">
-    <p:bg>
-      <p:bgPr>
-        <a:solidFill>
-          <a:srgbClr val="FFFFFF"/>
-        </a:solidFill>
-        <a:effectLst/>
-      </p:bgPr>
-    </p:bg>
-    <p:spTree>
-      <p:nvGrpSpPr>
-        <p:cNvPr id="1" name=""/>
-        <p:cNvGrpSpPr/>
-        <p:nvPr/>
-      </p:nvGrpSpPr>
-      <p:grpSpPr>
-        <a:xfrm>
-          <a:off x="0" y="0"/>
-          <a:ext cx="0" cy="0"/>
-          <a:chOff x="0" y="0"/>
-          <a:chExt cx="0" cy="0"/>
-        </a:xfrm>
-      </p:grpSpPr>
-      <p:sp>
-        <p:nvSpPr>
-          <p:cNvPr id="2" name="Shape 0"/>
-          <p:cNvSpPr/>
-          <p:nvPr/>
-        </p:nvSpPr>
-        <p:spPr>
-          <a:xfrm>
-            <a:off x="0" y="0"/>
-            <a:ext cx="12191695" cy="73152"/>
-          </a:xfrm>
-          <a:prstGeom prst="rect">
-            <a:avLst/>
-          </a:prstGeom>
-          <a:solidFill>
-            <a:srgbClr val="CA8F24"/>
-          </a:solidFill>
-          <a:ln/>
-        </p:spPr>
-        <p:txBody>
-          <a:bodyPr/>
-          <a:lstStyle/>
-          <a:p>
-            <a:endParaRPr lang="en-JO"/>
-          </a:p>
-        </p:txBody>
-      </p:sp>
-      <p:sp>
-        <p:nvSpPr>
-          <p:cNvPr id="3" name="Text 1"/>
-          <p:cNvSpPr/>
-          <p:nvPr/>
-        </p:nvSpPr>
-        <p:spPr>
-          <a:xfrm>
-            <a:off x="502920" y="347472"/>
-            <a:ext cx="8229600" cy="274320"/>
-          </a:xfrm>
-          <a:prstGeom prst="rect">
-            <a:avLst/>
-          </a:prstGeom>
-          <a:noFill/>
-          <a:ln/>
-        </p:spPr>
-        <p:txBody>
-          <a:bodyPr wrap="square" rtlCol="0" anchor="ctr"/>
-          <a:lstStyle/>
-          <a:p>
-            <a:pPr marL="0" indent="0">
-              <a:buNone/>
-            </a:pPr>
-            <a:r>
-              <a:rPr lang="en-US" sz="1200" b="1" kern="0" spc="150" dirty="0">
-                <a:solidFill>
-                  <a:srgbClr val="CA8F24"/>
-                </a:solidFill>
-                <a:latin typeface="Calibri" pitchFamily="34" charset="0"/>
-                <a:ea typeface="Calibri" pitchFamily="34" charset="-122"/>
-                <a:cs typeface="Calibri" pitchFamily="34" charset="-120"/>
-              </a:rPr>
-              <a:t>03 · THE DATA</a:t>
-            </a:r>
-            <a:endParaRPr lang="en-US" sz="1200" dirty="0"/>
-          </a:p>
-        </p:txBody>
-      </p:sp>
-      <p:sp>
-        <p:nvSpPr>
-          <p:cNvPr id="4" name="Text 2"/>
-          <p:cNvSpPr/>
-          <p:nvPr/>
-        </p:nvSpPr>
-        <p:spPr>
-          <a:xfrm>
-            <a:off x="502920" y="621792"/>
-            <a:ext cx="11155680" cy="658368"/>
-          </a:xfrm>
-          <a:prstGeom prst="rect">
-            <a:avLst/>
-          </a:prstGeom>
-          <a:noFill/>
-          <a:ln/>
-        </p:spPr>
-        <p:txBody>
-          <a:bodyPr wrap="square" rtlCol="0" anchor="ctr"/>
-          <a:lstStyle/>
-          <a:p>
-            <a:pPr marL="0" indent="0">
-              <a:buNone/>
-            </a:pPr>
-            <a:r>
-              <a:rPr lang="en-US" sz="2800" b="1" dirty="0">
-                <a:solidFill>
-                  <a:srgbClr val="143148"/>
-                </a:solidFill>
-                <a:latin typeface="Cambria" pitchFamily="34" charset="0"/>
-                <a:ea typeface="Cambria" pitchFamily="34" charset="-122"/>
-                <a:cs typeface="Cambria" pitchFamily="34" charset="-120"/>
-              </a:rPr>
-              <a:t>What Does One Row Represent?</a:t>
-            </a:r>
-            <a:endParaRPr lang="en-US" sz="2800" dirty="0"/>
-          </a:p>
-        </p:txBody>
-      </p:sp>
-      <p:sp>
-        <p:nvSpPr>
-          <p:cNvPr id="5" name="Text 3"/>
-          <p:cNvSpPr/>
-          <p:nvPr/>
-        </p:nvSpPr>
-        <p:spPr>
-          <a:xfrm>
-            <a:off x="502920" y="6473952"/>
-            <a:ext cx="3200400" cy="274320"/>
-          </a:xfrm>
-          <a:prstGeom prst="rect">
-            <a:avLst/>
-          </a:prstGeom>
-          <a:noFill/>
-          <a:ln/>
-        </p:spPr>
-        <p:txBody>
-          <a:bodyPr wrap="square" rtlCol="0" anchor="ctr"/>
-          <a:lstStyle/>
-          <a:p>
-            <a:pPr marL="0" indent="0">
-              <a:buNone/>
-            </a:pPr>
-            <a:r>
-              <a:rPr lang="en-US" sz="1000" dirty="0">
-                <a:solidFill>
-                  <a:srgbClr val="6E6E6E"/>
-                </a:solidFill>
-                <a:latin typeface="Calibri" pitchFamily="34" charset="0"/>
-                <a:ea typeface="Calibri" pitchFamily="34" charset="-122"/>
-                <a:cs typeface="Calibri" pitchFamily="34" charset="-120"/>
-              </a:rPr>
-              <a:t>SolarWise Jordan</a:t>
-            </a:r>
-            <a:endParaRPr lang="en-US" sz="1000" dirty="0"/>
-          </a:p>
-        </p:txBody>
-      </p:sp>
-      <p:sp>
-        <p:nvSpPr>
-          <p:cNvPr id="6" name="Text 4"/>
-          <p:cNvSpPr/>
-          <p:nvPr/>
-        </p:nvSpPr>
-        <p:spPr>
-          <a:xfrm>
-            <a:off x="11231575" y="6473952"/>
-            <a:ext cx="457200" cy="274320"/>
-          </a:xfrm>
-          <a:prstGeom prst="rect">
-            <a:avLst/>
-          </a:prstGeom>
-          <a:noFill/>
-          <a:ln/>
-        </p:spPr>
-        <p:txBody>
-          <a:bodyPr wrap="square" rtlCol="0" anchor="ctr"/>
-          <a:lstStyle/>
-          <a:p>
-            <a:pPr marL="0" indent="0" algn="r">
-              <a:buNone/>
-            </a:pPr>
-            <a:r>
-              <a:rPr lang="en-US" sz="1000" dirty="0">
-                <a:solidFill>
-                  <a:srgbClr val="6E6E6E"/>
-                </a:solidFill>
-                <a:latin typeface="Calibri" pitchFamily="34" charset="0"/>
-                <a:ea typeface="Calibri" pitchFamily="34" charset="-122"/>
-                <a:cs typeface="Calibri" pitchFamily="34" charset="-120"/>
-              </a:rPr>
-              <a:t>8</a:t>
-            </a:r>
-            <a:endParaRPr lang="en-US" sz="1000" dirty="0"/>
-          </a:p>
-        </p:txBody>
-      </p:sp>
-      <p:sp>
-        <p:nvSpPr>
-          <p:cNvPr id="7" name="Shape 5"/>
-          <p:cNvSpPr/>
-          <p:nvPr/>
-        </p:nvSpPr>
-        <p:spPr>
-          <a:xfrm>
-            <a:off x="502920" y="1691640"/>
-            <a:ext cx="5440680" cy="4160520"/>
-          </a:xfrm>
-          <a:prstGeom prst="roundRect">
-            <a:avLst>
-              <a:gd name="adj" fmla="val 1758"/>
-            </a:avLst>
-          </a:prstGeom>
-          <a:solidFill>
-            <a:srgbClr val="F5F5F5"/>
-          </a:solidFill>
-          <a:ln/>
-        </p:spPr>
-        <p:txBody>
-          <a:bodyPr/>
-          <a:lstStyle/>
-          <a:p>
-            <a:endParaRPr lang="en-JO"/>
-          </a:p>
-        </p:txBody>
-      </p:sp>
-      <p:sp>
-        <p:nvSpPr>
-          <p:cNvPr id="8" name="Text 6"/>
-          <p:cNvSpPr/>
-          <p:nvPr/>
-        </p:nvSpPr>
-        <p:spPr>
-          <a:xfrm>
-            <a:off x="777240" y="1920240"/>
-            <a:ext cx="4937760" cy="274320"/>
-          </a:xfrm>
-          <a:prstGeom prst="rect">
-            <a:avLst/>
-          </a:prstGeom>
-          <a:noFill/>
-          <a:ln/>
-        </p:spPr>
-        <p:txBody>
-          <a:bodyPr wrap="square" rtlCol="0" anchor="ctr"/>
-          <a:lstStyle/>
-          <a:p>
-            <a:pPr marL="0" indent="0">
-              <a:buNone/>
-            </a:pPr>
-            <a:r>
-              <a:rPr lang="en-US" sz="1200" b="1" dirty="0">
-                <a:solidFill>
-                  <a:srgbClr val="CA8F24"/>
-                </a:solidFill>
-                <a:latin typeface="Calibri" pitchFamily="34" charset="0"/>
-                <a:ea typeface="Calibri" pitchFamily="34" charset="-122"/>
-                <a:cs typeface="Calibri" pitchFamily="34" charset="-120"/>
-              </a:rPr>
-              <a:t>DATA STRUCTURE</a:t>
-            </a:r>
-            <a:endParaRPr lang="en-US" sz="1200" dirty="0"/>
-          </a:p>
-        </p:txBody>
-      </p:sp>
-      <p:sp>
-        <p:nvSpPr>
-          <p:cNvPr id="9" name="Text 7"/>
-          <p:cNvSpPr/>
-          <p:nvPr/>
-        </p:nvSpPr>
-        <p:spPr>
-          <a:xfrm>
-            <a:off x="777240" y="2286000"/>
-            <a:ext cx="4892040" cy="3383280"/>
-          </a:xfrm>
-          <a:prstGeom prst="rect">
-            <a:avLst/>
-          </a:prstGeom>
-          <a:noFill/>
-          <a:ln/>
-        </p:spPr>
-        <p:txBody>
-          <a:bodyPr wrap="square" rtlCol="0" anchor="t"/>
-          <a:lstStyle/>
-          <a:p>
-            <a:pPr marL="228600" indent="-228600">
-              <a:lnSpc>
-                <a:spcPts val="1690"/>
-              </a:lnSpc>
-              <a:spcAft>
-                <a:spcPts val="1400"/>
-              </a:spcAft>
-              <a:buSzPct val="100000"/>
-              <a:buChar char="●"/>
-            </a:pPr>
-            <a:r>
-              <a:rPr lang="en-US" sz="1300" dirty="0">
-                <a:solidFill>
-                  <a:srgbClr val="414141"/>
-                </a:solidFill>
-                <a:latin typeface="Calibri" pitchFamily="34" charset="0"/>
-                <a:ea typeface="Calibri" pitchFamily="34" charset="-122"/>
-                <a:cs typeface="Calibri" pitchFamily="34" charset="-120"/>
-              </a:rPr>
-              <a:t>One row represents one day of weather data at one geographic location.</a:t>
-            </a:r>
-            <a:endParaRPr lang="en-US" sz="1300" dirty="0"/>
-          </a:p>
-          <a:p>
-            <a:pPr marL="228600" indent="-228600">
-              <a:lnSpc>
-                <a:spcPts val="1690"/>
-              </a:lnSpc>
-              <a:spcAft>
-                <a:spcPts val="1400"/>
-              </a:spcAft>
-              <a:buSzPct val="100000"/>
-              <a:buChar char="●"/>
-            </a:pPr>
-            <a:r>
-              <a:rPr lang="en-US" sz="1300" dirty="0">
-                <a:solidFill>
-                  <a:srgbClr val="414141"/>
-                </a:solidFill>
-                <a:latin typeface="Calibri" pitchFamily="34" charset="0"/>
-                <a:ea typeface="Calibri" pitchFamily="34" charset="-122"/>
-                <a:cs typeface="Calibri" pitchFamily="34" charset="-120"/>
-              </a:rPr>
-              <a:t>Each record contains latitude, longitude and elevation information.</a:t>
-            </a:r>
-            <a:endParaRPr lang="en-US" sz="1300" dirty="0"/>
-          </a:p>
-          <a:p>
-            <a:pPr marL="228600" indent="-228600">
-              <a:lnSpc>
-                <a:spcPts val="1690"/>
-              </a:lnSpc>
-              <a:spcAft>
-                <a:spcPts val="1400"/>
-              </a:spcAft>
-              <a:buSzPct val="100000"/>
-              <a:buChar char="●"/>
-            </a:pPr>
-            <a:r>
-              <a:rPr lang="en-US" sz="1300" dirty="0">
-                <a:solidFill>
-                  <a:srgbClr val="414141"/>
-                </a:solidFill>
-                <a:latin typeface="Calibri" pitchFamily="34" charset="0"/>
-                <a:ea typeface="Calibri" pitchFamily="34" charset="-122"/>
-                <a:cs typeface="Calibri" pitchFamily="34" charset="-120"/>
-              </a:rPr>
-              <a:t>The dataset contains daily observations from 2020 to 2025.</a:t>
-            </a:r>
-            <a:endParaRPr lang="en-US" sz="1300" dirty="0"/>
-          </a:p>
-          <a:p>
-            <a:pPr marL="228600" indent="-228600">
-              <a:lnSpc>
-                <a:spcPts val="1690"/>
-              </a:lnSpc>
-              <a:spcAft>
-                <a:spcPts val="1400"/>
-              </a:spcAft>
-              <a:buSzPct val="100000"/>
-              <a:buChar char="●"/>
-            </a:pPr>
-            <a:r>
-              <a:rPr lang="en-US" sz="1300" dirty="0">
-                <a:solidFill>
-                  <a:srgbClr val="414141"/>
-                </a:solidFill>
-                <a:latin typeface="Calibri" pitchFamily="34" charset="0"/>
-                <a:ea typeface="Calibri" pitchFamily="34" charset="-122"/>
-                <a:cs typeface="Calibri" pitchFamily="34" charset="-120"/>
-              </a:rPr>
-              <a:t>The raw NASA POWER parameter codes were renamed into plain-language column names.</a:t>
-            </a:r>
-            <a:endParaRPr lang="en-US" sz="1300" dirty="0"/>
-          </a:p>
-        </p:txBody>
-      </p:sp>
-      <p:sp>
-        <p:nvSpPr>
-          <p:cNvPr id="10" name="Shape 8"/>
-          <p:cNvSpPr/>
-          <p:nvPr/>
-        </p:nvSpPr>
-        <p:spPr>
-          <a:xfrm>
-            <a:off x="6245352" y="1691640"/>
-            <a:ext cx="5440680" cy="4160520"/>
-          </a:xfrm>
-          <a:prstGeom prst="roundRect">
-            <a:avLst>
-              <a:gd name="adj" fmla="val 1758"/>
-            </a:avLst>
-          </a:prstGeom>
-          <a:solidFill>
-            <a:srgbClr val="F5F5F5"/>
-          </a:solidFill>
-          <a:ln/>
-        </p:spPr>
-        <p:txBody>
-          <a:bodyPr/>
-          <a:lstStyle/>
-          <a:p>
-            <a:endParaRPr lang="en-JO"/>
-          </a:p>
-        </p:txBody>
-      </p:sp>
-      <p:sp>
-        <p:nvSpPr>
-          <p:cNvPr id="11" name="Text 9"/>
-          <p:cNvSpPr/>
-          <p:nvPr/>
-        </p:nvSpPr>
-        <p:spPr>
-          <a:xfrm>
-            <a:off x="6519672" y="1920240"/>
-            <a:ext cx="4937760" cy="274320"/>
-          </a:xfrm>
-          <a:prstGeom prst="rect">
-            <a:avLst/>
-          </a:prstGeom>
-          <a:noFill/>
-          <a:ln/>
-        </p:spPr>
-        <p:txBody>
-          <a:bodyPr wrap="square" rtlCol="0" anchor="ctr"/>
-          <a:lstStyle/>
-          <a:p>
-            <a:pPr marL="0" indent="0">
-              <a:buNone/>
-            </a:pPr>
-            <a:r>
-              <a:rPr lang="en-US" sz="1200" b="1" dirty="0">
-                <a:solidFill>
-                  <a:srgbClr val="CA8F24"/>
-                </a:solidFill>
-                <a:latin typeface="Calibri" pitchFamily="34" charset="0"/>
-                <a:ea typeface="Calibri" pitchFamily="34" charset="-122"/>
-                <a:cs typeface="Calibri" pitchFamily="34" charset="-120"/>
-              </a:rPr>
-              <a:t>MAIN WEATHER VARIABLES</a:t>
-            </a:r>
-            <a:endParaRPr lang="en-US" sz="1200" dirty="0"/>
-          </a:p>
-        </p:txBody>
-      </p:sp>
-      <p:sp>
-        <p:nvSpPr>
-          <p:cNvPr id="12" name="Shape 10"/>
-          <p:cNvSpPr/>
-          <p:nvPr/>
-        </p:nvSpPr>
-        <p:spPr>
-          <a:xfrm>
-            <a:off x="6519672" y="2331720"/>
-            <a:ext cx="4892040" cy="384048"/>
-          </a:xfrm>
-          <a:prstGeom prst="roundRect">
-            <a:avLst>
-              <a:gd name="adj" fmla="val 11905"/>
-            </a:avLst>
-          </a:prstGeom>
-          <a:solidFill>
-            <a:srgbClr val="FFFFFF"/>
-          </a:solidFill>
-          <a:ln/>
-        </p:spPr>
-        <p:txBody>
-          <a:bodyPr/>
-          <a:lstStyle/>
-          <a:p>
-            <a:endParaRPr lang="en-JO"/>
-          </a:p>
-        </p:txBody>
-      </p:sp>
-      <p:sp>
-        <p:nvSpPr>
-          <p:cNvPr id="13" name="Text 11"/>
-          <p:cNvSpPr/>
-          <p:nvPr/>
-        </p:nvSpPr>
-        <p:spPr>
-          <a:xfrm>
-            <a:off x="6702552" y="2331720"/>
-            <a:ext cx="4572000" cy="384048"/>
-          </a:xfrm>
-          <a:prstGeom prst="rect">
-            <a:avLst/>
-          </a:prstGeom>
-          <a:noFill/>
-          <a:ln/>
-        </p:spPr>
-        <p:txBody>
-          <a:bodyPr wrap="square" rtlCol="0" anchor="ctr"/>
-          <a:lstStyle/>
-          <a:p>
-            <a:pPr marL="0" indent="0">
-              <a:buNone/>
-            </a:pPr>
-            <a:r>
-              <a:rPr lang="en-US" sz="1250" b="1" dirty="0">
-                <a:solidFill>
-                  <a:srgbClr val="143148"/>
-                </a:solidFill>
-                <a:latin typeface="Calibri" pitchFamily="34" charset="0"/>
-                <a:ea typeface="Calibri" pitchFamily="34" charset="-122"/>
-                <a:cs typeface="Calibri" pitchFamily="34" charset="-120"/>
-              </a:rPr>
-              <a:t>Solar irradiance</a:t>
-            </a:r>
-            <a:endParaRPr lang="en-US" sz="1250" dirty="0"/>
-          </a:p>
-        </p:txBody>
-      </p:sp>
-      <p:sp>
-        <p:nvSpPr>
-          <p:cNvPr id="14" name="Shape 12"/>
-          <p:cNvSpPr/>
-          <p:nvPr/>
-        </p:nvSpPr>
-        <p:spPr>
-          <a:xfrm>
-            <a:off x="6519672" y="2788920"/>
-            <a:ext cx="4892040" cy="384048"/>
-          </a:xfrm>
-          <a:prstGeom prst="roundRect">
-            <a:avLst>
-              <a:gd name="adj" fmla="val 11905"/>
-            </a:avLst>
-          </a:prstGeom>
-          <a:solidFill>
-            <a:srgbClr val="FFFFFF"/>
-          </a:solidFill>
-          <a:ln/>
-        </p:spPr>
-        <p:txBody>
-          <a:bodyPr/>
-          <a:lstStyle/>
-          <a:p>
-            <a:endParaRPr lang="en-JO"/>
-          </a:p>
-        </p:txBody>
-      </p:sp>
-      <p:sp>
-        <p:nvSpPr>
-          <p:cNvPr id="15" name="Text 13"/>
-          <p:cNvSpPr/>
-          <p:nvPr/>
-        </p:nvSpPr>
-        <p:spPr>
-          <a:xfrm>
-            <a:off x="6702552" y="2788920"/>
-            <a:ext cx="4572000" cy="384048"/>
-          </a:xfrm>
-          <a:prstGeom prst="rect">
-            <a:avLst/>
-          </a:prstGeom>
-          <a:noFill/>
-          <a:ln/>
-        </p:spPr>
-        <p:txBody>
-          <a:bodyPr wrap="square" rtlCol="0" anchor="ctr"/>
-          <a:lstStyle/>
-          <a:p>
-            <a:pPr marL="0" indent="0">
-              <a:buNone/>
-            </a:pPr>
-            <a:r>
-              <a:rPr lang="en-US" sz="1250" b="1" dirty="0">
-                <a:solidFill>
-                  <a:srgbClr val="143148"/>
-                </a:solidFill>
-                <a:latin typeface="Calibri" pitchFamily="34" charset="0"/>
-                <a:ea typeface="Calibri" pitchFamily="34" charset="-122"/>
-                <a:cs typeface="Calibri" pitchFamily="34" charset="-120"/>
-              </a:rPr>
-              <a:t>Clear-sky irradiance</a:t>
-            </a:r>
-            <a:endParaRPr lang="en-US" sz="1250" dirty="0"/>
-          </a:p>
-        </p:txBody>
-      </p:sp>
-      <p:sp>
-        <p:nvSpPr>
-          <p:cNvPr id="16" name="Shape 14"/>
-          <p:cNvSpPr/>
-          <p:nvPr/>
-        </p:nvSpPr>
-        <p:spPr>
-          <a:xfrm>
-            <a:off x="6519672" y="3246120"/>
-            <a:ext cx="4892040" cy="384048"/>
-          </a:xfrm>
-          <a:prstGeom prst="roundRect">
-            <a:avLst>
-              <a:gd name="adj" fmla="val 11905"/>
-            </a:avLst>
-          </a:prstGeom>
-          <a:solidFill>
-            <a:srgbClr val="FFFFFF"/>
-          </a:solidFill>
-          <a:ln/>
-        </p:spPr>
-        <p:txBody>
-          <a:bodyPr/>
-          <a:lstStyle/>
-          <a:p>
-            <a:endParaRPr lang="en-JO"/>
-          </a:p>
-        </p:txBody>
-      </p:sp>
-      <p:sp>
-        <p:nvSpPr>
-          <p:cNvPr id="17" name="Text 15"/>
-          <p:cNvSpPr/>
-          <p:nvPr/>
-        </p:nvSpPr>
-        <p:spPr>
-          <a:xfrm>
-            <a:off x="6702552" y="3246120"/>
-            <a:ext cx="4572000" cy="384048"/>
-          </a:xfrm>
-          <a:prstGeom prst="rect">
-            <a:avLst/>
-          </a:prstGeom>
-          <a:noFill/>
-          <a:ln/>
-        </p:spPr>
-        <p:txBody>
-          <a:bodyPr wrap="square" rtlCol="0" anchor="ctr"/>
-          <a:lstStyle/>
-          <a:p>
-            <a:pPr marL="0" indent="0">
-              <a:buNone/>
-            </a:pPr>
-            <a:r>
-              <a:rPr lang="en-US" sz="1250" b="1" dirty="0">
-                <a:solidFill>
-                  <a:srgbClr val="143148"/>
-                </a:solidFill>
-                <a:latin typeface="Calibri" pitchFamily="34" charset="0"/>
-                <a:ea typeface="Calibri" pitchFamily="34" charset="-122"/>
-                <a:cs typeface="Calibri" pitchFamily="34" charset="-120"/>
-              </a:rPr>
-              <a:t>Temperature</a:t>
-            </a:r>
-            <a:endParaRPr lang="en-US" sz="1250" dirty="0"/>
-          </a:p>
-        </p:txBody>
-      </p:sp>
-      <p:sp>
-        <p:nvSpPr>
-          <p:cNvPr id="18" name="Shape 16"/>
-          <p:cNvSpPr/>
-          <p:nvPr/>
-        </p:nvSpPr>
-        <p:spPr>
-          <a:xfrm>
-            <a:off x="6519672" y="3703320"/>
-            <a:ext cx="4892040" cy="384048"/>
-          </a:xfrm>
-          <a:prstGeom prst="roundRect">
-            <a:avLst>
-              <a:gd name="adj" fmla="val 11905"/>
-            </a:avLst>
-          </a:prstGeom>
-          <a:solidFill>
-            <a:srgbClr val="FFFFFF"/>
-          </a:solidFill>
-          <a:ln/>
-        </p:spPr>
-        <p:txBody>
-          <a:bodyPr/>
-          <a:lstStyle/>
-          <a:p>
-            <a:endParaRPr lang="en-JO"/>
-          </a:p>
-        </p:txBody>
-      </p:sp>
-      <p:sp>
-        <p:nvSpPr>
-          <p:cNvPr id="19" name="Text 17"/>
-          <p:cNvSpPr/>
-          <p:nvPr/>
-        </p:nvSpPr>
-        <p:spPr>
-          <a:xfrm>
-            <a:off x="6702552" y="3703320"/>
-            <a:ext cx="4572000" cy="384048"/>
-          </a:xfrm>
-          <a:prstGeom prst="rect">
-            <a:avLst/>
-          </a:prstGeom>
-          <a:noFill/>
-          <a:ln/>
-        </p:spPr>
-        <p:txBody>
-          <a:bodyPr wrap="square" rtlCol="0" anchor="ctr"/>
-          <a:lstStyle/>
-          <a:p>
-            <a:pPr marL="0" indent="0">
-              <a:buNone/>
-            </a:pPr>
-            <a:r>
-              <a:rPr lang="en-US" sz="1250" b="1" dirty="0">
-                <a:solidFill>
-                  <a:srgbClr val="143148"/>
-                </a:solidFill>
-                <a:latin typeface="Calibri" pitchFamily="34" charset="0"/>
-                <a:ea typeface="Calibri" pitchFamily="34" charset="-122"/>
-                <a:cs typeface="Calibri" pitchFamily="34" charset="-120"/>
-              </a:rPr>
-              <a:t>Humidity</a:t>
-            </a:r>
-            <a:endParaRPr lang="en-US" sz="1250" dirty="0"/>
-          </a:p>
-        </p:txBody>
-      </p:sp>
-      <p:sp>
-        <p:nvSpPr>
-          <p:cNvPr id="20" name="Shape 18"/>
-          <p:cNvSpPr/>
-          <p:nvPr/>
-        </p:nvSpPr>
-        <p:spPr>
-          <a:xfrm>
-            <a:off x="6519672" y="4160520"/>
-            <a:ext cx="4892040" cy="384048"/>
-          </a:xfrm>
-          <a:prstGeom prst="roundRect">
-            <a:avLst>
-              <a:gd name="adj" fmla="val 11905"/>
-            </a:avLst>
-          </a:prstGeom>
-          <a:solidFill>
-            <a:srgbClr val="FFFFFF"/>
-          </a:solidFill>
-          <a:ln/>
-        </p:spPr>
-        <p:txBody>
-          <a:bodyPr/>
-          <a:lstStyle/>
-          <a:p>
-            <a:endParaRPr lang="en-JO"/>
-          </a:p>
-        </p:txBody>
-      </p:sp>
-      <p:sp>
-        <p:nvSpPr>
-          <p:cNvPr id="21" name="Text 19"/>
-          <p:cNvSpPr/>
-          <p:nvPr/>
-        </p:nvSpPr>
-        <p:spPr>
-          <a:xfrm>
-            <a:off x="6702552" y="4160520"/>
-            <a:ext cx="4572000" cy="384048"/>
-          </a:xfrm>
-          <a:prstGeom prst="rect">
-            <a:avLst/>
-          </a:prstGeom>
-          <a:noFill/>
-          <a:ln/>
-        </p:spPr>
-        <p:txBody>
-          <a:bodyPr wrap="square" rtlCol="0" anchor="ctr"/>
-          <a:lstStyle/>
-          <a:p>
-            <a:pPr marL="0" indent="0">
-              <a:buNone/>
-            </a:pPr>
-            <a:r>
-              <a:rPr lang="en-US" sz="1250" b="1" dirty="0">
-                <a:solidFill>
-                  <a:srgbClr val="143148"/>
-                </a:solidFill>
-                <a:latin typeface="Calibri" pitchFamily="34" charset="0"/>
-                <a:ea typeface="Calibri" pitchFamily="34" charset="-122"/>
-                <a:cs typeface="Calibri" pitchFamily="34" charset="-120"/>
-              </a:rPr>
-              <a:t>Cloud cover</a:t>
-            </a:r>
-            <a:endParaRPr lang="en-US" sz="1250" dirty="0"/>
-          </a:p>
-        </p:txBody>
-      </p:sp>
-      <p:sp>
-        <p:nvSpPr>
-          <p:cNvPr id="22" name="Shape 20"/>
-          <p:cNvSpPr/>
-          <p:nvPr/>
-        </p:nvSpPr>
-        <p:spPr>
-          <a:xfrm>
-            <a:off x="6519672" y="4617720"/>
-            <a:ext cx="4892040" cy="384048"/>
-          </a:xfrm>
-          <a:prstGeom prst="roundRect">
-            <a:avLst>
-              <a:gd name="adj" fmla="val 11905"/>
-            </a:avLst>
-          </a:prstGeom>
-          <a:solidFill>
-            <a:srgbClr val="FFFFFF"/>
-          </a:solidFill>
-          <a:ln/>
-        </p:spPr>
-        <p:txBody>
-          <a:bodyPr/>
-          <a:lstStyle/>
-          <a:p>
-            <a:endParaRPr lang="en-JO"/>
-          </a:p>
-        </p:txBody>
-      </p:sp>
-      <p:sp>
-        <p:nvSpPr>
-          <p:cNvPr id="23" name="Text 21"/>
-          <p:cNvSpPr/>
-          <p:nvPr/>
-        </p:nvSpPr>
-        <p:spPr>
-          <a:xfrm>
-            <a:off x="6702552" y="4617720"/>
-            <a:ext cx="4572000" cy="384048"/>
-          </a:xfrm>
-          <a:prstGeom prst="rect">
-            <a:avLst/>
-          </a:prstGeom>
-          <a:noFill/>
-          <a:ln/>
-        </p:spPr>
-        <p:txBody>
-          <a:bodyPr wrap="square" rtlCol="0" anchor="ctr"/>
-          <a:lstStyle/>
-          <a:p>
-            <a:pPr marL="0" indent="0">
-              <a:buNone/>
-            </a:pPr>
-            <a:r>
-              <a:rPr lang="en-US" sz="1250" b="1" dirty="0">
-                <a:solidFill>
-                  <a:srgbClr val="143148"/>
-                </a:solidFill>
-                <a:latin typeface="Calibri" pitchFamily="34" charset="0"/>
-                <a:ea typeface="Calibri" pitchFamily="34" charset="-122"/>
-                <a:cs typeface="Calibri" pitchFamily="34" charset="-120"/>
-              </a:rPr>
-              <a:t>Wind speed</a:t>
-            </a:r>
-            <a:endParaRPr lang="en-US" sz="1250" dirty="0"/>
-          </a:p>
-        </p:txBody>
-      </p:sp>
-      <p:sp>
-        <p:nvSpPr>
-          <p:cNvPr id="24" name="Shape 22"/>
-          <p:cNvSpPr/>
-          <p:nvPr/>
-        </p:nvSpPr>
-        <p:spPr>
-          <a:xfrm>
-            <a:off x="6519672" y="5074920"/>
-            <a:ext cx="4892040" cy="384048"/>
-          </a:xfrm>
-          <a:prstGeom prst="roundRect">
-            <a:avLst>
-              <a:gd name="adj" fmla="val 11905"/>
-            </a:avLst>
-          </a:prstGeom>
-          <a:solidFill>
-            <a:srgbClr val="FFFFFF"/>
-          </a:solidFill>
-          <a:ln/>
-        </p:spPr>
-        <p:txBody>
-          <a:bodyPr/>
-          <a:lstStyle/>
-          <a:p>
-            <a:endParaRPr lang="en-JO"/>
-          </a:p>
-        </p:txBody>
-      </p:sp>
-      <p:sp>
-        <p:nvSpPr>
-          <p:cNvPr id="25" name="Text 23"/>
-          <p:cNvSpPr/>
-          <p:nvPr/>
-        </p:nvSpPr>
-        <p:spPr>
-          <a:xfrm>
-            <a:off x="6702552" y="5074920"/>
-            <a:ext cx="4572000" cy="384048"/>
-          </a:xfrm>
-          <a:prstGeom prst="rect">
-            <a:avLst/>
-          </a:prstGeom>
-          <a:noFill/>
-          <a:ln/>
-        </p:spPr>
-        <p:txBody>
-          <a:bodyPr wrap="square" rtlCol="0" anchor="ctr"/>
-          <a:lstStyle/>
-          <a:p>
-            <a:pPr marL="0" indent="0">
-              <a:buNone/>
-            </a:pPr>
-            <a:r>
-              <a:rPr lang="en-US" sz="1250" b="1" dirty="0">
-                <a:solidFill>
-                  <a:srgbClr val="143148"/>
-                </a:solidFill>
-                <a:latin typeface="Calibri" pitchFamily="34" charset="0"/>
-                <a:ea typeface="Calibri" pitchFamily="34" charset="-122"/>
-                <a:cs typeface="Calibri" pitchFamily="34" charset="-120"/>
-              </a:rPr>
-              <a:t>Precipitation</a:t>
-            </a:r>
-            <a:endParaRPr lang="en-US" sz="1250" dirty="0"/>
-          </a:p>
-        </p:txBody>
-      </p:sp>
-    </p:spTree>
-  </p:cSld>
-  <p:clrMapOvr>
-    <a:masterClrMapping/>
-  </p:clrMapOvr>
-</p:sld>
-</file>
-
-<file path=ppt/slides/slide7.xml><?xml version="1.0" encoding="utf-8"?>
-<p:sld xmlns:a="http://schemas.openxmlformats.org/drawingml/2006/main" xmlns:r="http://schemas.openxmlformats.org/officeDocument/2006/relationships" xmlns:p="http://schemas.openxmlformats.org/presentationml/2006/main">
   <p:cSld name="Slide 9">
     <p:bg>
       <p:bgPr>
@@ -17491,7 +15720,7 @@
 </p:sld>
 </file>
 
-<file path=ppt/slides/slide8.xml><?xml version="1.0" encoding="utf-8"?>
+<file path=ppt/slides/slide7.xml><?xml version="1.0" encoding="utf-8"?>
 <p:sld xmlns:a="http://schemas.openxmlformats.org/drawingml/2006/main" xmlns:r="http://schemas.openxmlformats.org/officeDocument/2006/relationships" xmlns:p="http://schemas.openxmlformats.org/presentationml/2006/main">
   <p:cSld name="Slide 11">
     <p:bg>
@@ -18161,7 +16390,7 @@
 </p:sld>
 </file>
 
-<file path=ppt/slides/slide9.xml><?xml version="1.0" encoding="utf-8"?>
+<file path=ppt/slides/slide8.xml><?xml version="1.0" encoding="utf-8"?>
 <p:sld xmlns:a="http://schemas.openxmlformats.org/drawingml/2006/main" xmlns:r="http://schemas.openxmlformats.org/officeDocument/2006/relationships" xmlns:p="http://schemas.openxmlformats.org/presentationml/2006/main">
   <p:cSld name="Slide 12">
     <p:bg>
@@ -18720,6 +16949,738 @@
                 <a:cs typeface="Calibri" pitchFamily="34" charset="-120"/>
               </a:rPr>
               <a:t>a single yearly average would hide the months that actually decide whether solar pays.</a:t>
+            </a:r>
+            <a:endParaRPr lang="en-US" sz="1300" dirty="0"/>
+          </a:p>
+        </p:txBody>
+      </p:sp>
+    </p:spTree>
+  </p:cSld>
+  <p:clrMapOvr>
+    <a:masterClrMapping/>
+  </p:clrMapOvr>
+</p:sld>
+</file>
+
+<file path=ppt/slides/slide9.xml><?xml version="1.0" encoding="utf-8"?>
+<p:sld xmlns:a="http://schemas.openxmlformats.org/drawingml/2006/main" xmlns:r="http://schemas.openxmlformats.org/officeDocument/2006/relationships" xmlns:p="http://schemas.openxmlformats.org/presentationml/2006/main">
+  <p:cSld name="Slide 13">
+    <p:bg>
+      <p:bgPr>
+        <a:solidFill>
+          <a:srgbClr val="FFFFFF"/>
+        </a:solidFill>
+        <a:effectLst/>
+      </p:bgPr>
+    </p:bg>
+    <p:spTree>
+      <p:nvGrpSpPr>
+        <p:cNvPr id="1" name=""/>
+        <p:cNvGrpSpPr/>
+        <p:nvPr/>
+      </p:nvGrpSpPr>
+      <p:grpSpPr>
+        <a:xfrm>
+          <a:off x="0" y="0"/>
+          <a:ext cx="0" cy="0"/>
+          <a:chOff x="0" y="0"/>
+          <a:chExt cx="0" cy="0"/>
+        </a:xfrm>
+      </p:grpSpPr>
+      <p:sp>
+        <p:nvSpPr>
+          <p:cNvPr id="2" name="Shape 0"/>
+          <p:cNvSpPr/>
+          <p:nvPr/>
+        </p:nvSpPr>
+        <p:spPr>
+          <a:xfrm>
+            <a:off x="0" y="0"/>
+            <a:ext cx="12191695" cy="73152"/>
+          </a:xfrm>
+          <a:prstGeom prst="rect">
+            <a:avLst/>
+          </a:prstGeom>
+          <a:solidFill>
+            <a:srgbClr val="CA8F24"/>
+          </a:solidFill>
+          <a:ln/>
+        </p:spPr>
+        <p:txBody>
+          <a:bodyPr/>
+          <a:lstStyle/>
+          <a:p>
+            <a:endParaRPr lang="en-JO"/>
+          </a:p>
+        </p:txBody>
+      </p:sp>
+      <p:sp>
+        <p:nvSpPr>
+          <p:cNvPr id="3" name="Text 1"/>
+          <p:cNvSpPr/>
+          <p:nvPr/>
+        </p:nvSpPr>
+        <p:spPr>
+          <a:xfrm>
+            <a:off x="502920" y="347472"/>
+            <a:ext cx="8229600" cy="274320"/>
+          </a:xfrm>
+          <a:prstGeom prst="rect">
+            <a:avLst/>
+          </a:prstGeom>
+          <a:noFill/>
+          <a:ln/>
+        </p:spPr>
+        <p:txBody>
+          <a:bodyPr wrap="square" rtlCol="0" anchor="ctr"/>
+          <a:lstStyle/>
+          <a:p>
+            <a:pPr marL="0" indent="0">
+              <a:buNone/>
+            </a:pPr>
+            <a:r>
+              <a:rPr lang="en-US" sz="1200" b="1" kern="0" spc="150" dirty="0">
+                <a:solidFill>
+                  <a:srgbClr val="CA8F24"/>
+                </a:solidFill>
+                <a:latin typeface="Calibri" pitchFamily="34" charset="0"/>
+                <a:ea typeface="Calibri" pitchFamily="34" charset="-122"/>
+                <a:cs typeface="Calibri" pitchFamily="34" charset="-120"/>
+              </a:rPr>
+              <a:t>05 · FINDINGS</a:t>
+            </a:r>
+            <a:endParaRPr lang="en-US" sz="1200" dirty="0"/>
+          </a:p>
+        </p:txBody>
+      </p:sp>
+      <p:sp>
+        <p:nvSpPr>
+          <p:cNvPr id="4" name="Text 2"/>
+          <p:cNvSpPr/>
+          <p:nvPr/>
+        </p:nvSpPr>
+        <p:spPr>
+          <a:xfrm>
+            <a:off x="502920" y="621792"/>
+            <a:ext cx="11155680" cy="658368"/>
+          </a:xfrm>
+          <a:prstGeom prst="rect">
+            <a:avLst/>
+          </a:prstGeom>
+          <a:noFill/>
+          <a:ln/>
+        </p:spPr>
+        <p:txBody>
+          <a:bodyPr wrap="square" rtlCol="0" anchor="ctr"/>
+          <a:lstStyle/>
+          <a:p>
+            <a:pPr marL="0" indent="0">
+              <a:buNone/>
+            </a:pPr>
+            <a:r>
+              <a:rPr lang="en-US" sz="2800" b="1" dirty="0">
+                <a:solidFill>
+                  <a:srgbClr val="143148"/>
+                </a:solidFill>
+                <a:latin typeface="Cambria" pitchFamily="34" charset="0"/>
+                <a:ea typeface="Cambria" pitchFamily="34" charset="-122"/>
+                <a:cs typeface="Cambria" pitchFamily="34" charset="-120"/>
+              </a:rPr>
+              <a:t>Finding 2 — Heat Hurts, and It Is Hidden</a:t>
+            </a:r>
+            <a:endParaRPr lang="en-US" sz="2800" dirty="0"/>
+          </a:p>
+        </p:txBody>
+      </p:sp>
+      <p:sp>
+        <p:nvSpPr>
+          <p:cNvPr id="5" name="Text 3"/>
+          <p:cNvSpPr/>
+          <p:nvPr/>
+        </p:nvSpPr>
+        <p:spPr>
+          <a:xfrm>
+            <a:off x="502920" y="6473952"/>
+            <a:ext cx="3200400" cy="274320"/>
+          </a:xfrm>
+          <a:prstGeom prst="rect">
+            <a:avLst/>
+          </a:prstGeom>
+          <a:noFill/>
+          <a:ln/>
+        </p:spPr>
+        <p:txBody>
+          <a:bodyPr wrap="square" rtlCol="0" anchor="ctr"/>
+          <a:lstStyle/>
+          <a:p>
+            <a:pPr marL="0" indent="0">
+              <a:buNone/>
+            </a:pPr>
+            <a:r>
+              <a:rPr lang="en-US" sz="1000" dirty="0">
+                <a:solidFill>
+                  <a:srgbClr val="6E6E6E"/>
+                </a:solidFill>
+                <a:latin typeface="Calibri" pitchFamily="34" charset="0"/>
+                <a:ea typeface="Calibri" pitchFamily="34" charset="-122"/>
+                <a:cs typeface="Calibri" pitchFamily="34" charset="-120"/>
+              </a:rPr>
+              <a:t>SolarWise Jordan</a:t>
+            </a:r>
+            <a:endParaRPr lang="en-US" sz="1000" dirty="0"/>
+          </a:p>
+        </p:txBody>
+      </p:sp>
+      <p:sp>
+        <p:nvSpPr>
+          <p:cNvPr id="6" name="Text 4"/>
+          <p:cNvSpPr/>
+          <p:nvPr/>
+        </p:nvSpPr>
+        <p:spPr>
+          <a:xfrm>
+            <a:off x="11231575" y="6473952"/>
+            <a:ext cx="457200" cy="274320"/>
+          </a:xfrm>
+          <a:prstGeom prst="rect">
+            <a:avLst/>
+          </a:prstGeom>
+          <a:noFill/>
+          <a:ln/>
+        </p:spPr>
+        <p:txBody>
+          <a:bodyPr wrap="square" rtlCol="0" anchor="ctr"/>
+          <a:lstStyle/>
+          <a:p>
+            <a:pPr marL="0" indent="0" algn="r">
+              <a:buNone/>
+            </a:pPr>
+            <a:r>
+              <a:rPr lang="en-US" sz="1000" dirty="0">
+                <a:solidFill>
+                  <a:srgbClr val="6E6E6E"/>
+                </a:solidFill>
+                <a:latin typeface="Calibri" pitchFamily="34" charset="0"/>
+                <a:ea typeface="Calibri" pitchFamily="34" charset="-122"/>
+                <a:cs typeface="Calibri" pitchFamily="34" charset="-120"/>
+              </a:rPr>
+              <a:t>13</a:t>
+            </a:r>
+            <a:endParaRPr lang="en-US" sz="1000" dirty="0"/>
+          </a:p>
+        </p:txBody>
+      </p:sp>
+      <p:sp>
+        <p:nvSpPr>
+          <p:cNvPr id="7" name="Text 5"/>
+          <p:cNvSpPr/>
+          <p:nvPr/>
+        </p:nvSpPr>
+        <p:spPr>
+          <a:xfrm>
+            <a:off x="502920" y="1298448"/>
+            <a:ext cx="10515600" cy="365760"/>
+          </a:xfrm>
+          <a:prstGeom prst="rect">
+            <a:avLst/>
+          </a:prstGeom>
+          <a:noFill/>
+          <a:ln/>
+        </p:spPr>
+        <p:txBody>
+          <a:bodyPr wrap="square" rtlCol="0" anchor="ctr"/>
+          <a:lstStyle/>
+          <a:p>
+            <a:pPr marL="0" indent="0">
+              <a:buNone/>
+            </a:pPr>
+            <a:r>
+              <a:rPr lang="en-US" sz="1300" i="1" dirty="0">
+                <a:solidFill>
+                  <a:srgbClr val="6E6E6E"/>
+                </a:solidFill>
+                <a:latin typeface="Calibri" pitchFamily="34" charset="0"/>
+                <a:ea typeface="Calibri" pitchFamily="34" charset="-122"/>
+                <a:cs typeface="Calibri" pitchFamily="34" charset="-120"/>
+              </a:rPr>
+              <a:t>The raw correlation says one thing; a fair comparison says the opposite.</a:t>
+            </a:r>
+            <a:endParaRPr lang="en-US" sz="1300" dirty="0"/>
+          </a:p>
+        </p:txBody>
+      </p:sp>
+      <p:sp>
+        <p:nvSpPr>
+          <p:cNvPr id="8" name="Shape 6"/>
+          <p:cNvSpPr/>
+          <p:nvPr/>
+        </p:nvSpPr>
+        <p:spPr>
+          <a:xfrm>
+            <a:off x="502920" y="1828800"/>
+            <a:ext cx="5440680" cy="2743200"/>
+          </a:xfrm>
+          <a:prstGeom prst="roundRect">
+            <a:avLst>
+              <a:gd name="adj" fmla="val 2667"/>
+            </a:avLst>
+          </a:prstGeom>
+          <a:solidFill>
+            <a:srgbClr val="F5F5F5"/>
+          </a:solidFill>
+          <a:ln/>
+        </p:spPr>
+        <p:txBody>
+          <a:bodyPr/>
+          <a:lstStyle/>
+          <a:p>
+            <a:endParaRPr lang="en-JO"/>
+          </a:p>
+        </p:txBody>
+      </p:sp>
+      <p:sp>
+        <p:nvSpPr>
+          <p:cNvPr id="9" name="Text 7"/>
+          <p:cNvSpPr/>
+          <p:nvPr/>
+        </p:nvSpPr>
+        <p:spPr>
+          <a:xfrm>
+            <a:off x="777240" y="2011680"/>
+            <a:ext cx="4937760" cy="274320"/>
+          </a:xfrm>
+          <a:prstGeom prst="rect">
+            <a:avLst/>
+          </a:prstGeom>
+          <a:noFill/>
+          <a:ln/>
+        </p:spPr>
+        <p:txBody>
+          <a:bodyPr wrap="square" rtlCol="0" anchor="ctr"/>
+          <a:lstStyle/>
+          <a:p>
+            <a:pPr marL="0" indent="0">
+              <a:buNone/>
+            </a:pPr>
+            <a:r>
+              <a:rPr lang="en-US" sz="1150" b="1" dirty="0">
+                <a:solidFill>
+                  <a:srgbClr val="CA8F24"/>
+                </a:solidFill>
+                <a:latin typeface="Calibri" pitchFamily="34" charset="0"/>
+                <a:ea typeface="Calibri" pitchFamily="34" charset="-122"/>
+                <a:cs typeface="Calibri" pitchFamily="34" charset="-120"/>
+              </a:rPr>
+              <a:t>WHAT THE NUMBERS SEEM TO SAY</a:t>
+            </a:r>
+            <a:endParaRPr lang="en-US" sz="1150" dirty="0"/>
+          </a:p>
+        </p:txBody>
+      </p:sp>
+      <p:sp>
+        <p:nvSpPr>
+          <p:cNvPr id="10" name="Text 8"/>
+          <p:cNvSpPr/>
+          <p:nvPr/>
+        </p:nvSpPr>
+        <p:spPr>
+          <a:xfrm>
+            <a:off x="777240" y="2331720"/>
+            <a:ext cx="4892040" cy="640080"/>
+          </a:xfrm>
+          <a:prstGeom prst="rect">
+            <a:avLst/>
+          </a:prstGeom>
+          <a:noFill/>
+          <a:ln/>
+        </p:spPr>
+        <p:txBody>
+          <a:bodyPr wrap="square" rtlCol="0" anchor="ctr"/>
+          <a:lstStyle/>
+          <a:p>
+            <a:pPr marL="0" indent="0">
+              <a:buNone/>
+            </a:pPr>
+            <a:r>
+              <a:rPr lang="en-US" sz="3400" b="1" dirty="0">
+                <a:solidFill>
+                  <a:srgbClr val="143148"/>
+                </a:solidFill>
+                <a:latin typeface="Cambria" pitchFamily="34" charset="0"/>
+                <a:ea typeface="Cambria" pitchFamily="34" charset="-122"/>
+                <a:cs typeface="Cambria" pitchFamily="34" charset="-120"/>
+              </a:rPr>
+              <a:t>+0.69</a:t>
+            </a:r>
+            <a:endParaRPr lang="en-US" sz="3400" dirty="0"/>
+          </a:p>
+        </p:txBody>
+      </p:sp>
+      <p:sp>
+        <p:nvSpPr>
+          <p:cNvPr id="11" name="Text 9"/>
+          <p:cNvSpPr/>
+          <p:nvPr/>
+        </p:nvSpPr>
+        <p:spPr>
+          <a:xfrm>
+            <a:off x="777240" y="2971800"/>
+            <a:ext cx="4892040" cy="320040"/>
+          </a:xfrm>
+          <a:prstGeom prst="rect">
+            <a:avLst/>
+          </a:prstGeom>
+          <a:noFill/>
+          <a:ln/>
+        </p:spPr>
+        <p:txBody>
+          <a:bodyPr wrap="square" rtlCol="0" anchor="ctr"/>
+          <a:lstStyle/>
+          <a:p>
+            <a:pPr marL="0" indent="0">
+              <a:buNone/>
+            </a:pPr>
+            <a:r>
+              <a:rPr lang="en-US" sz="1100" dirty="0">
+                <a:solidFill>
+                  <a:srgbClr val="6E6E6E"/>
+                </a:solidFill>
+                <a:latin typeface="Calibri" pitchFamily="34" charset="0"/>
+                <a:ea typeface="Calibri" pitchFamily="34" charset="-122"/>
+                <a:cs typeface="Calibri" pitchFamily="34" charset="-120"/>
+              </a:rPr>
+              <a:t>correlation between temperature and output</a:t>
+            </a:r>
+            <a:endParaRPr lang="en-US" sz="1100" dirty="0"/>
+          </a:p>
+        </p:txBody>
+      </p:sp>
+      <p:sp>
+        <p:nvSpPr>
+          <p:cNvPr id="12" name="Text 10"/>
+          <p:cNvSpPr/>
+          <p:nvPr/>
+        </p:nvSpPr>
+        <p:spPr>
+          <a:xfrm>
+            <a:off x="777240" y="3383280"/>
+            <a:ext cx="4892040" cy="1051560"/>
+          </a:xfrm>
+          <a:prstGeom prst="rect">
+            <a:avLst/>
+          </a:prstGeom>
+          <a:noFill/>
+          <a:ln/>
+        </p:spPr>
+        <p:txBody>
+          <a:bodyPr wrap="square" rtlCol="0" anchor="t"/>
+          <a:lstStyle/>
+          <a:p>
+            <a:pPr marL="0" indent="0">
+              <a:buNone/>
+            </a:pPr>
+            <a:r>
+              <a:rPr lang="en-US" sz="1200" dirty="0">
+                <a:solidFill>
+                  <a:srgbClr val="414141"/>
+                </a:solidFill>
+                <a:latin typeface="Calibri" pitchFamily="34" charset="0"/>
+                <a:ea typeface="Calibri" pitchFamily="34" charset="-122"/>
+                <a:cs typeface="Calibri" pitchFamily="34" charset="-120"/>
+              </a:rPr>
+              <a:t>Hotter days appear to produce more. But that is the season talking — hot days in Jordan are also sunny days.</a:t>
+            </a:r>
+            <a:endParaRPr lang="en-US" sz="1200" dirty="0"/>
+          </a:p>
+        </p:txBody>
+      </p:sp>
+      <p:sp>
+        <p:nvSpPr>
+          <p:cNvPr id="13" name="Shape 11"/>
+          <p:cNvSpPr/>
+          <p:nvPr/>
+        </p:nvSpPr>
+        <p:spPr>
+          <a:xfrm>
+            <a:off x="6245352" y="1828800"/>
+            <a:ext cx="5440680" cy="2743200"/>
+          </a:xfrm>
+          <a:prstGeom prst="roundRect">
+            <a:avLst>
+              <a:gd name="adj" fmla="val 2667"/>
+            </a:avLst>
+          </a:prstGeom>
+          <a:solidFill>
+            <a:srgbClr val="EBEBEB"/>
+          </a:solidFill>
+          <a:ln/>
+        </p:spPr>
+        <p:txBody>
+          <a:bodyPr/>
+          <a:lstStyle/>
+          <a:p>
+            <a:endParaRPr lang="en-JO"/>
+          </a:p>
+        </p:txBody>
+      </p:sp>
+      <p:sp>
+        <p:nvSpPr>
+          <p:cNvPr id="14" name="Text 12"/>
+          <p:cNvSpPr/>
+          <p:nvPr/>
+        </p:nvSpPr>
+        <p:spPr>
+          <a:xfrm>
+            <a:off x="6519672" y="2011680"/>
+            <a:ext cx="4937760" cy="274320"/>
+          </a:xfrm>
+          <a:prstGeom prst="rect">
+            <a:avLst/>
+          </a:prstGeom>
+          <a:noFill/>
+          <a:ln/>
+        </p:spPr>
+        <p:txBody>
+          <a:bodyPr wrap="square" rtlCol="0" anchor="ctr"/>
+          <a:lstStyle/>
+          <a:p>
+            <a:pPr marL="0" indent="0">
+              <a:buNone/>
+            </a:pPr>
+            <a:r>
+              <a:rPr lang="en-US" sz="1150" b="1" dirty="0">
+                <a:solidFill>
+                  <a:srgbClr val="CA8F24"/>
+                </a:solidFill>
+                <a:latin typeface="Calibri" pitchFamily="34" charset="0"/>
+                <a:ea typeface="Calibri" pitchFamily="34" charset="-122"/>
+                <a:cs typeface="Calibri" pitchFamily="34" charset="-120"/>
+              </a:rPr>
+              <a:t>WHAT ACTUALLY HAPPENS</a:t>
+            </a:r>
+            <a:endParaRPr lang="en-US" sz="1150" dirty="0"/>
+          </a:p>
+        </p:txBody>
+      </p:sp>
+      <p:sp>
+        <p:nvSpPr>
+          <p:cNvPr id="15" name="Text 13"/>
+          <p:cNvSpPr/>
+          <p:nvPr/>
+        </p:nvSpPr>
+        <p:spPr>
+          <a:xfrm>
+            <a:off x="6519672" y="2331720"/>
+            <a:ext cx="4892040" cy="640080"/>
+          </a:xfrm>
+          <a:prstGeom prst="rect">
+            <a:avLst/>
+          </a:prstGeom>
+          <a:noFill/>
+          <a:ln/>
+        </p:spPr>
+        <p:txBody>
+          <a:bodyPr wrap="square" rtlCol="0" anchor="ctr"/>
+          <a:lstStyle/>
+          <a:p>
+            <a:pPr marL="0" indent="0">
+              <a:buNone/>
+            </a:pPr>
+            <a:r>
+              <a:rPr lang="en-US" sz="3400" b="1" dirty="0">
+                <a:solidFill>
+                  <a:srgbClr val="143148"/>
+                </a:solidFill>
+                <a:latin typeface="Cambria" pitchFamily="34" charset="0"/>
+                <a:ea typeface="Cambria" pitchFamily="34" charset="-122"/>
+                <a:cs typeface="Cambria" pitchFamily="34" charset="-120"/>
+              </a:rPr>
+              <a:t>−0.64</a:t>
+            </a:r>
+            <a:endParaRPr lang="en-US" sz="3400" dirty="0"/>
+          </a:p>
+        </p:txBody>
+      </p:sp>
+      <p:sp>
+        <p:nvSpPr>
+          <p:cNvPr id="16" name="Text 14"/>
+          <p:cNvSpPr/>
+          <p:nvPr/>
+        </p:nvSpPr>
+        <p:spPr>
+          <a:xfrm>
+            <a:off x="6519672" y="2971800"/>
+            <a:ext cx="4892040" cy="320040"/>
+          </a:xfrm>
+          <a:prstGeom prst="rect">
+            <a:avLst/>
+          </a:prstGeom>
+          <a:noFill/>
+          <a:ln/>
+        </p:spPr>
+        <p:txBody>
+          <a:bodyPr wrap="square" rtlCol="0" anchor="ctr"/>
+          <a:lstStyle/>
+          <a:p>
+            <a:pPr marL="0" indent="0">
+              <a:buNone/>
+            </a:pPr>
+            <a:r>
+              <a:rPr lang="en-US" sz="1100" dirty="0">
+                <a:solidFill>
+                  <a:srgbClr val="6E6E6E"/>
+                </a:solidFill>
+                <a:latin typeface="Calibri" pitchFamily="34" charset="0"/>
+                <a:ea typeface="Calibri" pitchFamily="34" charset="-122"/>
+                <a:cs typeface="Calibri" pitchFamily="34" charset="-120"/>
+              </a:rPr>
+              <a:t>once days with the same sunlight are compared</a:t>
+            </a:r>
+            <a:endParaRPr lang="en-US" sz="1100" dirty="0"/>
+          </a:p>
+        </p:txBody>
+      </p:sp>
+      <p:sp>
+        <p:nvSpPr>
+          <p:cNvPr id="17" name="Text 15"/>
+          <p:cNvSpPr/>
+          <p:nvPr/>
+        </p:nvSpPr>
+        <p:spPr>
+          <a:xfrm>
+            <a:off x="6519672" y="3383280"/>
+            <a:ext cx="4892040" cy="1051560"/>
+          </a:xfrm>
+          <a:prstGeom prst="rect">
+            <a:avLst/>
+          </a:prstGeom>
+          <a:noFill/>
+          <a:ln/>
+        </p:spPr>
+        <p:txBody>
+          <a:bodyPr wrap="square" rtlCol="0" anchor="t"/>
+          <a:lstStyle/>
+          <a:p>
+            <a:pPr marL="0" indent="0">
+              <a:buNone/>
+            </a:pPr>
+            <a:r>
+              <a:rPr lang="en-US" sz="1200" dirty="0">
+                <a:solidFill>
+                  <a:srgbClr val="414141"/>
+                </a:solidFill>
+                <a:latin typeface="Calibri" pitchFamily="34" charset="0"/>
+                <a:ea typeface="Calibri" pitchFamily="34" charset="-122"/>
+                <a:cs typeface="Calibri" pitchFamily="34" charset="-120"/>
+              </a:rPr>
+              <a:t>Hold sunlight constant and hot days produce 5.2% less. The physics was there all along, hidden by the season.</a:t>
+            </a:r>
+            <a:endParaRPr lang="en-US" sz="1200" dirty="0"/>
+          </a:p>
+        </p:txBody>
+      </p:sp>
+      <p:sp>
+        <p:nvSpPr>
+          <p:cNvPr id="18" name="Shape 16"/>
+          <p:cNvSpPr/>
+          <p:nvPr/>
+        </p:nvSpPr>
+        <p:spPr>
+          <a:xfrm>
+            <a:off x="502920" y="4800600"/>
+            <a:ext cx="11183112" cy="1508760"/>
+          </a:xfrm>
+          <a:prstGeom prst="roundRect">
+            <a:avLst>
+              <a:gd name="adj" fmla="val 3636"/>
+            </a:avLst>
+          </a:prstGeom>
+          <a:solidFill>
+            <a:srgbClr val="143148"/>
+          </a:solidFill>
+          <a:ln/>
+        </p:spPr>
+        <p:txBody>
+          <a:bodyPr/>
+          <a:lstStyle/>
+          <a:p>
+            <a:endParaRPr lang="en-JO"/>
+          </a:p>
+        </p:txBody>
+      </p:sp>
+      <p:sp>
+        <p:nvSpPr>
+          <p:cNvPr id="19" name="Text 17"/>
+          <p:cNvSpPr/>
+          <p:nvPr/>
+        </p:nvSpPr>
+        <p:spPr>
+          <a:xfrm>
+            <a:off x="777240" y="4956048"/>
+            <a:ext cx="10515600" cy="274320"/>
+          </a:xfrm>
+          <a:prstGeom prst="rect">
+            <a:avLst/>
+          </a:prstGeom>
+          <a:noFill/>
+          <a:ln/>
+        </p:spPr>
+        <p:txBody>
+          <a:bodyPr wrap="square" rtlCol="0" anchor="ctr"/>
+          <a:lstStyle/>
+          <a:p>
+            <a:pPr marL="0" indent="0">
+              <a:buNone/>
+            </a:pPr>
+            <a:r>
+              <a:rPr lang="en-US" sz="1200" b="1" dirty="0">
+                <a:solidFill>
+                  <a:srgbClr val="EEBE51"/>
+                </a:solidFill>
+                <a:latin typeface="Calibri" pitchFamily="34" charset="0"/>
+                <a:ea typeface="Calibri" pitchFamily="34" charset="-122"/>
+                <a:cs typeface="Calibri" pitchFamily="34" charset="-120"/>
+              </a:rPr>
+              <a:t>WHY THE PEAK MONTH IS JUNE, NOT JULY</a:t>
+            </a:r>
+            <a:endParaRPr lang="en-US" sz="1200" dirty="0"/>
+          </a:p>
+        </p:txBody>
+      </p:sp>
+      <p:sp>
+        <p:nvSpPr>
+          <p:cNvPr id="20" name="Text 18"/>
+          <p:cNvSpPr/>
+          <p:nvPr/>
+        </p:nvSpPr>
+        <p:spPr>
+          <a:xfrm>
+            <a:off x="777240" y="5285232"/>
+            <a:ext cx="10607040" cy="914400"/>
+          </a:xfrm>
+          <a:prstGeom prst="rect">
+            <a:avLst/>
+          </a:prstGeom>
+          <a:noFill/>
+          <a:ln/>
+        </p:spPr>
+        <p:txBody>
+          <a:bodyPr wrap="square" rtlCol="0" anchor="t"/>
+          <a:lstStyle/>
+          <a:p>
+            <a:pPr marL="0" indent="0">
+              <a:buNone/>
+            </a:pPr>
+            <a:r>
+              <a:rPr lang="en-US" sz="1300" dirty="0">
+                <a:solidFill>
+                  <a:srgbClr val="FFFFFF"/>
+                </a:solidFill>
+                <a:latin typeface="Calibri" pitchFamily="34" charset="0"/>
+                <a:ea typeface="Calibri" pitchFamily="34" charset="-122"/>
+                <a:cs typeface="Calibri" pitchFamily="34" charset="-120"/>
+              </a:rPr>
+              <a:t>July receives slightly more sunlight, but it is hotter — and the panels pay for it. The model reproduces this without being told.</a:t>
             </a:r>
             <a:endParaRPr lang="en-US" sz="1300" dirty="0"/>
           </a:p>
